--- a/Testning från noll.pptx
+++ b/Testning från noll.pptx
@@ -4,6 +4,9 @@
   <p:sldMasterIdLst>
     <p:sldMasterId id="2147483648" r:id="rId1"/>
   </p:sldMasterIdLst>
+  <p:notesMasterIdLst>
+    <p:notesMasterId r:id="rId19"/>
+  </p:notesMasterIdLst>
   <p:sldIdLst>
     <p:sldId id="256" r:id="rId2"/>
     <p:sldId id="257" r:id="rId3"/>
@@ -23,10 +26,7 @@
     <p:sldId id="271" r:id="rId17"/>
     <p:sldId id="272" r:id="rId18"/>
   </p:sldIdLst>
-  <p:notesMasterIdLst>
-    <p:notesMasterId r:id="rId19"/>
-  </p:notesMasterIdLst>
-  <p:sldSz cx="9144000" cy="5143500"/>
+  <p:sldSz cx="9144000" cy="5143500" type="screen16x9"/>
   <p:notesSz cx="5143500" cy="9144000"/>
   <p:defaultTextStyle>
     <a:lvl1pPr marL="0" algn="l" defTabSz="914400" rtl="0" eaLnBrk="1" latinLnBrk="0" hangingPunct="1">
@@ -120,6 +120,11 @@
       </a:defRPr>
     </a:lvl9pPr>
   </p:defaultTextStyle>
+  <p:extLst>
+    <p:ext uri="{EFAFB233-063F-42B5-8137-9DF3F51BA10A}">
+      <p15:sldGuideLst xmlns:p15="http://schemas.microsoft.com/office/powerpoint/2012/main"/>
+    </p:ext>
+  </p:extLst>
 </p:presentation>
 </file>
 
@@ -145,234 +150,10 @@
           <a:chExt cx="0" cy="0"/>
         </a:xfrm>
       </p:grpSpPr>
-      <p:sp>
-        <p:nvSpPr>
-          <p:cNvPr id="2" name="Header Placeholder 1"/>
-          <p:cNvSpPr>
-            <a:spLocks noGrp="1"/>
-          </p:cNvSpPr>
-          <p:nvPr>
-            <p:ph type="hdr" sz="quarter"/>
-          </p:nvPr>
-        </p:nvSpPr>
-        <p:spPr>
-          <a:xfrm>
-            <a:off x="0" y="0"/>
-            <a:ext cx="2971800" cy="458788"/>
-          </a:xfrm>
-          <a:prstGeom prst="rect">
-            <a:avLst/>
-          </a:prstGeom>
-        </p:spPr>
-        <p:txBody>
-          <a:bodyPr vert="horz" lIns="91440" tIns="45720" rIns="91440" bIns="45720" rtlCol="0"/>
-          <a:lstStyle>
-            <a:lvl1pPr algn="l">
-              <a:defRPr sz="1200"/>
-            </a:lvl1pPr>
-          </a:lstStyle>
-          <a:p>
-            <a:endParaRPr lang="en-US"/>
-          </a:p>
-        </p:txBody>
-      </p:sp>
-      <p:sp>
-        <p:nvSpPr>
-          <p:cNvPr id="3" name="Date Placeholder 2"/>
-          <p:cNvSpPr>
-            <a:spLocks noGrp="1"/>
-          </p:cNvSpPr>
-          <p:nvPr>
-            <p:ph type="dt" idx="1"/>
-          </p:nvPr>
-        </p:nvSpPr>
-        <p:spPr>
-          <a:xfrm>
-            <a:off x="3884613" y="0"/>
-            <a:ext cx="2971800" cy="458788"/>
-          </a:xfrm>
-          <a:prstGeom prst="rect">
-            <a:avLst/>
-          </a:prstGeom>
-        </p:spPr>
-        <p:txBody>
-          <a:bodyPr vert="horz" lIns="91440" tIns="45720" rIns="91440" bIns="45720" rtlCol="0"/>
-          <a:lstStyle>
-            <a:lvl1pPr algn="r">
-              <a:defRPr sz="1200"/>
-            </a:lvl1pPr>
-          </a:lstStyle>
-          <a:p>
-            <a:fld id="{5282F153-3F37-0F45-9E97-73ACFA13230C}" type="datetimeFigureOut">
-              <a:rPr lang="en-US"/>
-              <a:t>7/23/19</a:t>
-            </a:fld>
-            <a:endParaRPr lang="en-US"/>
-          </a:p>
-        </p:txBody>
-      </p:sp>
-      <p:sp>
-        <p:nvSpPr>
-          <p:cNvPr id="4" name="Slide Image Placeholder 3"/>
-          <p:cNvSpPr>
-            <a:spLocks noGrp="1" noRot="1" noChangeAspect="1"/>
-          </p:cNvSpPr>
-          <p:nvPr>
-            <p:ph type="sldImg" idx="2"/>
-          </p:nvPr>
-        </p:nvSpPr>
-        <p:spPr>
-          <a:xfrm>
-            <a:off x="685800" y="1143000"/>
-            <a:ext cx="5486400" cy="3086100"/>
-          </a:xfrm>
-          <a:prstGeom prst="rect">
-            <a:avLst/>
-          </a:prstGeom>
-          <a:noFill/>
-          <a:ln w="12700">
-            <a:solidFill>
-              <a:prstClr val="black"/>
-            </a:solidFill>
-          </a:ln>
-        </p:spPr>
-        <p:txBody>
-          <a:bodyPr vert="horz" lIns="91440" tIns="45720" rIns="91440" bIns="45720" rtlCol="0" anchor="ctr"/>
-          <a:lstStyle/>
-          <a:p>
-            <a:endParaRPr lang="en-US"/>
-          </a:p>
-        </p:txBody>
-      </p:sp>
-      <p:sp>
-        <p:nvSpPr>
-          <p:cNvPr id="5" name="Notes Placeholder 4"/>
-          <p:cNvSpPr>
-            <a:spLocks noGrp="1"/>
-          </p:cNvSpPr>
-          <p:nvPr>
-            <p:ph type="body" sz="quarter" idx="3"/>
-          </p:nvPr>
-        </p:nvSpPr>
-        <p:spPr>
-          <a:xfrm>
-            <a:off x="685800" y="4400550"/>
-            <a:ext cx="5486400" cy="3600450"/>
-          </a:xfrm>
-          <a:prstGeom prst="rect">
-            <a:avLst/>
-          </a:prstGeom>
-        </p:spPr>
-        <p:txBody>
-          <a:bodyPr vert="horz" lIns="91440" tIns="45720" rIns="91440" bIns="45720" rtlCol="0"/>
-          <a:lstStyle/>
-          <a:p>
-            <a:pPr lvl="0"/>
-            <a:r>
-              <a:rPr lang="en-US"/>
-              <a:t>Click to edit Master text styles</a:t>
-            </a:r>
-          </a:p>
-          <a:p>
-            <a:pPr lvl="1"/>
-            <a:r>
-              <a:rPr lang="en-US"/>
-              <a:t>Second level</a:t>
-            </a:r>
-          </a:p>
-          <a:p>
-            <a:pPr lvl="2"/>
-            <a:r>
-              <a:rPr lang="en-US"/>
-              <a:t>Third level</a:t>
-            </a:r>
-          </a:p>
-          <a:p>
-            <a:pPr lvl="3"/>
-            <a:r>
-              <a:rPr lang="en-US"/>
-              <a:t>Fourth level</a:t>
-            </a:r>
-          </a:p>
-          <a:p>
-            <a:pPr lvl="4"/>
-            <a:r>
-              <a:rPr lang="en-US"/>
-              <a:t>Fifth level</a:t>
-            </a:r>
-          </a:p>
-        </p:txBody>
-      </p:sp>
-      <p:sp>
-        <p:nvSpPr>
-          <p:cNvPr id="6" name="Footer Placeholder 5"/>
-          <p:cNvSpPr>
-            <a:spLocks noGrp="1"/>
-          </p:cNvSpPr>
-          <p:nvPr>
-            <p:ph type="ftr" sz="quarter" idx="4"/>
-          </p:nvPr>
-        </p:nvSpPr>
-        <p:spPr>
-          <a:xfrm>
-            <a:off x="0" y="8685213"/>
-            <a:ext cx="2971800" cy="458787"/>
-          </a:xfrm>
-          <a:prstGeom prst="rect">
-            <a:avLst/>
-          </a:prstGeom>
-        </p:spPr>
-        <p:txBody>
-          <a:bodyPr vert="horz" lIns="91440" tIns="45720" rIns="91440" bIns="45720" rtlCol="0" anchor="b"/>
-          <a:lstStyle>
-            <a:lvl1pPr algn="l">
-              <a:defRPr sz="1200"/>
-            </a:lvl1pPr>
-          </a:lstStyle>
-          <a:p>
-            <a:endParaRPr lang="en-US"/>
-          </a:p>
-        </p:txBody>
-      </p:sp>
-      <p:sp>
-        <p:nvSpPr>
-          <p:cNvPr id="7" name="Slide Number Placeholder 6"/>
-          <p:cNvSpPr>
-            <a:spLocks noGrp="1"/>
-          </p:cNvSpPr>
-          <p:nvPr>
-            <p:ph type="sldNum" sz="quarter" idx="5"/>
-          </p:nvPr>
-        </p:nvSpPr>
-        <p:spPr>
-          <a:xfrm>
-            <a:off x="3884613" y="8685213"/>
-            <a:ext cx="2971800" cy="458787"/>
-          </a:xfrm>
-          <a:prstGeom prst="rect">
-            <a:avLst/>
-          </a:prstGeom>
-        </p:spPr>
-        <p:txBody>
-          <a:bodyPr vert="horz" lIns="91440" tIns="45720" rIns="91440" bIns="45720" rtlCol="0" anchor="b"/>
-          <a:lstStyle>
-            <a:lvl1pPr algn="r">
-              <a:defRPr sz="1200"/>
-            </a:lvl1pPr>
-          </a:lstStyle>
-          <a:p>
-            <a:fld id="{CE5E9CC1-C706-0F49-92D6-E571CC5EEA8F}" type="slidenum">
-              <a:rPr lang="en-US"/>
-              <a:t>‹#›</a:t>
-            </a:fld>
-            <a:endParaRPr lang="en-US"/>
-          </a:p>
-        </p:txBody>
-      </p:sp>
     </p:spTree>
     <p:extLst>
       <p:ext uri="{BB962C8B-B14F-4D97-AF65-F5344CB8AC3E}">
-        <p14:creationId xmlns:p14="http://schemas.microsoft.com/office/powerpoint/2010/main" val="1024086991"/>
+        <p14:creationId xmlns:p14="http://schemas.microsoft.com/office/powerpoint/2010/main" val="3825916155"/>
       </p:ext>
     </p:extLst>
   </p:cSld>
@@ -520,7 +301,6 @@
               <a:rPr lang="en-US" dirty="0"/>
               <a:t>Hej och välkomna. Idag ska vi prata testning. Ni är duktiga utvecklare, ni har skrivit .NET och TypeScript i flera år, men många av er har aldrig skrivit ett enda enhetstest. Det är inget att skämmas över — det är vanligare än man tror. Målet idag är inte att jag ska övertyga er om att testning är moraliskt rätt, utan att ni ska gå härifrån och kunna skriva ert första rimliga test imorgon bitti. Vi kommer hålla oss till stacken vi faktiskt jobbar med: xUnit i .NET, Jest i TypeScript, NSubstitute för mockning, Bogus för testdata, och office-addin-mock när vi rör Office.js. Avbryt gärna med frågor — det är bättre att vi reder ut något halvvägs än att ni gissar er fram efteråt.</a:t>
             </a:r>
-            <a:endParaRPr lang="en-US" dirty="0"/>
           </a:p>
         </p:txBody>
       </p:sp>
@@ -608,7 +388,6 @@
               <a:rPr lang="en-US" dirty="0"/>
               <a:t>Bogus löser ett tråkigt problem: när ni har ett objekt med femton properties och bara två är intressanta för det specifika testet. Istället för att handskriva new Customer { ... } med fiktiva värden definierar ni en Faker&lt;T&gt; en gång och får realistisk data gratis. Det blir både mindre kod och tydligare vad som faktiskt spelar roll för testet — det är de properties ni inte använder default-värden för. Två tips: använd lokal "sv" för svenska namn och adresser, och sätt en seed om ni behöver deterministiska tester.</a:t>
             </a:r>
-            <a:endParaRPr lang="en-US" dirty="0"/>
           </a:p>
         </p:txBody>
       </p:sp>
@@ -696,7 +475,6 @@
               <a:rPr lang="en-US" dirty="0"/>
               <a:t>Samma övning igen, men i TypeScript med Jest. describe grupperar relaterade tester, test (eller it, samma sak) är själva testet. expect(x).toBe(y) är Jests variant av Assert.Equal. Lägg märke till test.each — det är Jests motsvarighet till [Theory] med [InlineData]. Det är samma idé: en testfunktion, många datauppsättningar, en rad per fall i rapporten. För TypeScript-stöd kör de flesta antingen ts-jest eller babel/swc. Är ni i ett Office-tilläggsprojekt skapat med Yeoman-generatorn så är detta redan konfigurerat åt er.</a:t>
             </a:r>
-            <a:endParaRPr lang="en-US" dirty="0"/>
           </a:p>
         </p:txBody>
       </p:sp>
@@ -784,7 +562,6 @@
               <a:rPr lang="en-US" dirty="0"/>
               <a:t>Samma scenario som NSubstitute-exemplet, fast i Jest. Tre saker att notera. Ett: jest.Mocked&lt;T&gt; är ett TypeScript-trick som ger oss både typsäkerhet och tillgång till mock-API:et mockResolvedValue, toHaveBeenCalledWith osv. utan att TypeScript klagar. Två: vi sätter upp mockarna i beforeEach så att varje test får en ren slate — väldigt likt hur xUnit ger oss en ny klassinstans per test. Tre: expect.objectContaining och expect.stringContaining är "partial matchers" — vi bryr oss inte om alla fält, bara de relevanta. Det gör testen mindre spröda mot framtida ändringar.</a:t>
             </a:r>
-            <a:endParaRPr lang="en-US" dirty="0"/>
           </a:p>
         </p:txBody>
       </p:sp>
@@ -872,7 +649,6 @@
               <a:rPr lang="en-US" dirty="0"/>
               <a:t>Det här är där det börjar bli intressant. WebApplicationFactory startar hela ASP.NET Core-applikationen i minnet — riktig DI-container, riktig routing, riktig middleware-pipeline, riktig modelbinding. Det är inte en E2E-test för det är ingen browser inblandad och inget nätverk över sladd, men det är ett mycket bättre integrationstest än att försöka enhetstesta en controller direkt. Två viktiga saker. Ett: ni måste lägga raden "public partial class Program { }" längst ner i ert Program.cs — det är en konsekvens av .NET 6's minimal hosting model, för att test-projektet ska kunna referera Program-typen. Två: ConfigureTestServices är magin — där byter ni ut precis de dependencies ni vill kontrollera, ofta externa system. För databasen finns två populära strategier: in-memory provider för Entity Framework (snabb men inte 100 procent trogen) eller Testcontainers (riktig databas i Docker, mycket trogen, lite långsammare). För nya projekt rekommenderar jag Testcontainers när det går.</a:t>
             </a:r>
-            <a:endParaRPr lang="en-US" dirty="0"/>
           </a:p>
         </p:txBody>
       </p:sp>
@@ -960,7 +736,6 @@
               <a:rPr lang="en-US" dirty="0"/>
               <a:t>Microsoft Learn säger ordagrant: "The Office JavaScript APIs must initialize in a webview control in the context of an Office application, so they can't load in the process in which unit tests run on your development computer." Det är problemet. Lösningen är office-addin-mock — ett bibliotek från Microsoft som ger er ett OfficeMockObject som faktiskt håller intern state om vad som load:ats och sync:ats, så att felmeddelanden härmar verkligheten. Viktig fallgrop: om ert projekt sätter testEnvironment: "jsdom" i Jest-konfigen — vanligt i task pane-projekt — så fungerar inte office-addin-mock direkt. Sätt testEnvironment: "node" per fil med en docblock-kommentar, eller separera era Office-API-tester i en egen jest-projektkonfig. Det viktigaste tipset är ändå: bryt ut så mycket affärslogik som möjligt till rena funktioner som inte rör Office-objekten alls — då slipper ni office-addin-mock i merparten av era tester.</a:t>
             </a:r>
-            <a:endParaRPr lang="en-US" dirty="0"/>
           </a:p>
         </p:txBody>
       </p:sp>
@@ -1048,7 +823,6 @@
               <a:rPr lang="en-US" dirty="0"/>
               <a:t>Några erfarenhetsregler att ta med sig. Mocka aldrig er egen domänlogik — om ni mockar in ett IDiscountCalculator och bara säger "returnera 10" så testar ni egentligen ingenting alls. Mocka istället över gränsen mot omvärlden: databasen, HTTP, klockan, filsystemet, mail-tjänsten. Tester med Thread.Sleep eller setTimeout är en kodlukt — det betyder att ni testar timing och då kommer testen vara flaky. Injicera en klocka istället. Och — det här är kanske det viktigaste rådet — skriv testet som om personen som ska läsa det är trött, det är fredag eftermiddag, och produktionen brinner. Namn, struktur, en sak åt gången.</a:t>
             </a:r>
-            <a:endParaRPr lang="en-US" dirty="0"/>
           </a:p>
         </p:txBody>
       </p:sp>
@@ -1136,7 +910,6 @@
               <a:rPr lang="en-US" dirty="0"/>
               <a:t>Sista slidet. Gå inte härifrån och försök testa allt på måndag. Välj en klass. Helst en med riktig logik — en validator, en beräkning, en parser. Skriv tre tester. När ni nästa vecka stöter på en bugg, skriv testet som reproducerar buggen innan ni fixar. Då har ni dels en garanti att fixen funkar, dels en garanti att buggen aldrig kommer tillbaka. För Office-tillägg specifikt — det viktigaste tipset är att bryta ut affärslogiken till rena funktioner som inte rör Office.Context alls. De funktionerna kan ni testa hur lätt som helst utan att mocka något. Spara office-addin-mock till just de pjäser som faktiskt anropar Excel- eller Word-API:erna.</a:t>
             </a:r>
-            <a:endParaRPr lang="en-US" dirty="0"/>
           </a:p>
         </p:txBody>
       </p:sp>
@@ -1224,7 +997,6 @@
               <a:rPr lang="en-US" dirty="0"/>
               <a:t>Det här är de officiella källorna jag använt för att förbereda — alla har bra exempel och uppdaterade rekommendationer. Microsoft Learn-sidan om Office-tilläggstestning är den enda riktigt bra resursen för exakt vår nisch, så bokmärk den. Tack för att ni lyssnat — vilka frågor har ni?</a:t>
             </a:r>
-            <a:endParaRPr lang="en-US" dirty="0"/>
           </a:p>
         </p:txBody>
       </p:sp>
@@ -1312,7 +1084,6 @@
               <a:rPr lang="en-US" dirty="0"/>
               <a:t>Den klassiska invändningen är "vi hinner inte testa". Men tänk på er egen vardag. Hur testar ni idag att en ny funktion i ett Excel-tillägg fungerar? Ni bygger, sideloadar tillägget, väntar på att Excel startar, klickar er fram till rätt cell, ser att det blev fel, lägger en console.log, börjar om. Det är minuter per iteration. Ett enhetstest kör på millisekunder. Den andra stora vinsten kommer sex månader senare när någon ska ändra logiken i en faktureringsregel och inte vågar för att det är okänt vad som händer. Tester är den enda trovärdiga dokumentationen vi har på hur koden faktiskt beter sig, för kommentarer ljuger och Confluence är inaktuellt.</a:t>
             </a:r>
-            <a:endParaRPr lang="en-US" dirty="0"/>
           </a:p>
         </p:txBody>
       </p:sp>
@@ -1400,7 +1171,6 @@
               <a:rPr lang="en-US" dirty="0"/>
               <a:t>Begreppet "testpyramid" kommer från Mike Cohns bok Succeeding with Agile (2009), och har sedan dess populariserats av bland andra Martin Fowler. Idén håller än. Många tester längst ner där de är billiga, få tester längst upp där de är dyra. En vanlig nybörjarfälla är att hoppa direkt till E2E — "vi kör Playwright mot vår task pane". Det fungerar tills ni har 50 sådana tester och varje CI-bygge tar 45 minuter, hälften av testen är flaky, och ingen litar på röda byggen längre. Lägg er energi i botten av pyramiden först. För våra typer av system — Office-tillägg och små backends — fungerar 70/20/10 som riktmärke ganska bra.</a:t>
             </a:r>
-            <a:endParaRPr lang="en-US" dirty="0"/>
           </a:p>
         </p:txBody>
       </p:sp>
@@ -1488,7 +1258,6 @@
               <a:rPr lang="en-US" dirty="0"/>
               <a:t>Det här är slidet jag vill att ni fotograferar med mobilen. Fyra kolumner — vad det testar, hur snabbt, när, och med vilka verktyg. Lägg märke till att mutation testing är på en helt annan abstraktionsnivå — det testar inte din kod, det testar dina tester. Stryker.NET tar din kod, ändrar ett &gt; till ett &gt;=, ett + till ett -, ett true till ett false, och kör om alla dina tester. Om testerna fortfarande går grönt så har du en "överlevande mutant" — alltså en bugg du själv just införde, som inga av dina tester upptäckte. Det är ett brutalt ärligt mått på testkvalitet. Vi går inte djupare in på mutation idag, men kom ihåg att det finns när någon säger "vi har 95% kodtäckning" — täckning säger ingenting om kvalitet, mutation gör det.</a:t>
             </a:r>
-            <a:endParaRPr lang="en-US" dirty="0"/>
           </a:p>
         </p:txBody>
       </p:sp>
@@ -1576,7 +1345,6 @@
               <a:rPr lang="en-US" dirty="0"/>
               <a:t>AAA — Arrange, Act, Assert. Tre tydliga sektioner. Sätt upp, kör, verifiera. Om ert test börjar få fyra block är det inte ett test längre, det är en integrationstest i förklädnad. Namngivningen är viktigare än ni tror. Tänk att ni läser en test-rapport i CI klockan halv åtta på morgonen med kaffekoppen i handen. Test_1 säger ingenting. CalculateVat_NegativeAmount_ThrowsArgumentException säger allt. Mönstret Method_Scenario_ExpectedBehavior lanserades av Roy Osherove i The Art of Unit Testing — det är inte det enda gångbara, vissa föredrar BDD-stil med "Should…When…", men det är en mycket bra default som mappar rakt mot AAA.</a:t>
             </a:r>
-            <a:endParaRPr lang="en-US" dirty="0"/>
           </a:p>
         </p:txBody>
       </p:sp>
@@ -1664,7 +1432,6 @@
               <a:rPr lang="en-US" dirty="0"/>
               <a:t>Det här är det enklaste tänkbara xUnit-testet. [Fact] betyder "det här är ett test utan parametrar". xUnit skapar en ny instans av testklassen för varje test — det är medvetet, för att inget state ska läcka mellan tester. Variabelnamnet sut står för "system under test" och är en bra konvention som visar exakt vad du testar i raden under. För det negativa fallet använder vi Assert.Throws som verifierar både att rätt exception-typ kastas och att raden inte bara råkade fungera av andra skäl. Lägg också märke till att vi testar både ett glatt fall och ett felfall — det är poängen med tester, glada fall hittar man ändå manuellt.</a:t>
             </a:r>
-            <a:endParaRPr lang="en-US" dirty="0"/>
           </a:p>
         </p:txBody>
       </p:sp>
@@ -1752,7 +1519,6 @@
               <a:rPr lang="en-US" dirty="0"/>
               <a:t>[Theory] är xUnits sätt att säga "samma testlogik, många indata". Varje [InlineData] blir ett separat test i test-rapporten, så om ett edge-case går sönder ser ni exakt vilket. Det här är guld för validering, parsning, datumlogik — överallt där ni annars hade kopierat samma test fem gånger. Begränsningen är att argumenten måste vara kompileringskonstanter. Behöver ni mer komplexa objekt finns [MemberData] eller den nyare typsäkra TheoryData&lt;T1, T2, T3&gt;.</a:t>
             </a:r>
-            <a:endParaRPr lang="en-US" dirty="0"/>
           </a:p>
         </p:txBody>
       </p:sp>
@@ -1840,7 +1606,6 @@
               <a:rPr lang="en-US" dirty="0"/>
               <a:t>Den klassiska nybörjarfrågan är "men min klass anropar en databas, hur kan jag testa den?". Svaret är att du inte ska anropa databasen i ett enhetstest. Du ska anropa något som ser ut som databasen men som du har full kontroll över. Det är en mock. I .NET-världen är de tre stora Moq, NSubstitute och FakeItEasy. Vi går på NSubstitute idag — den har den renaste syntaxen och flest naturliga ord snarare än lambdor. Viktig sak att veta: mock-bibliotek i .NET fungerar bara mot interface eller virtual-medlemmar. Det är inte en bugg, det är hur .NET fungerar. Det betyder också att ni bör programmera mot interfaces — det är bra design oavsett.</a:t>
             </a:r>
-            <a:endParaRPr lang="en-US" dirty="0"/>
           </a:p>
         </p:txBody>
       </p:sp>
@@ -1928,7 +1693,6 @@
               <a:rPr lang="en-US" dirty="0"/>
               <a:t>Det här är en realistisk situation: en service som hämtar något, ändrar det, sparar det, och skickar ett mail. Tre saker att lägga märke till. Ett: vi mockar ICustomerRepository och IEmailSender — vi vill inte ha en riktig databas eller en riktig SMTP-server inblandad. Två: repo.GetByIdAsync(id).Returns(customer) — det är så NSubstitute uttrycker "när någon frågar efter just det här id:t, returnera det här objektet". Naturlig syntax. Tre: vi verifierar inte bara resultatet utan också beteendet — att SaveAsync anropades exakt en gång med en customer som har IsActive = false, och att mail skickades. I felfallet använder vi DidNotReceive() för att verifiera att vi inte skickar mail till okända kunder.</a:t>
             </a:r>
-            <a:endParaRPr lang="en-US" dirty="0"/>
           </a:p>
         </p:txBody>
       </p:sp>
@@ -2001,6 +1765,11 @@
 <file path=ppt/slideMasters/slideMaster1.xml><?xml version="1.0" encoding="utf-8"?>
 <p:sldMaster xmlns:a="http://schemas.openxmlformats.org/drawingml/2006/main" xmlns:r="http://schemas.openxmlformats.org/officeDocument/2006/relationships" xmlns:p="http://schemas.openxmlformats.org/presentationml/2006/main">
   <p:cSld>
+    <p:bg>
+      <p:bgRef idx="1001">
+        <a:schemeClr val="bg1"/>
+      </p:bgRef>
+    </p:bg>
     <p:spTree>
       <p:nvGrpSpPr>
         <p:cNvPr id="1" name=""/>
@@ -2283,6 +2052,7 @@
         <a:solidFill>
           <a:srgbClr val="232B2B"/>
         </a:solidFill>
+        <a:effectLst/>
       </p:bgPr>
     </p:bg>
     <p:spTree>
@@ -2323,6 +2093,13 @@
             <a:prstDash val="solid"/>
           </a:ln>
         </p:spPr>
+        <p:txBody>
+          <a:bodyPr/>
+          <a:lstStyle/>
+          <a:p>
+            <a:endParaRPr lang="sv-SE"/>
+          </a:p>
+        </p:txBody>
       </p:sp>
       <p:sp>
         <p:nvSpPr>
@@ -2345,7 +2122,7 @@
           <a:bodyPr wrap="square" lIns="0" tIns="0" rIns="0" bIns="0" rtlCol="0" anchor="ctr"/>
           <a:lstStyle/>
           <a:p>
-            <a:pPr algn="l" indent="0" marL="0">
+            <a:pPr marL="0" indent="0" algn="l">
               <a:buNone/>
             </a:pPr>
             <a:r>
@@ -2384,7 +2161,7 @@
           <a:bodyPr wrap="square" lIns="0" tIns="0" rIns="0" bIns="0" rtlCol="0" anchor="t"/>
           <a:lstStyle/>
           <a:p>
-            <a:pPr algn="l" indent="0" marL="0">
+            <a:pPr marL="0" indent="0" algn="l">
               <a:buNone/>
             </a:pPr>
             <a:r>
@@ -2423,7 +2200,7 @@
           <a:bodyPr wrap="square" lIns="0" tIns="0" rIns="0" bIns="0" rtlCol="0" anchor="ctr"/>
           <a:lstStyle/>
           <a:p>
-            <a:pPr algn="l" indent="0" marL="0">
+            <a:pPr marL="0" indent="0" algn="l">
               <a:buNone/>
             </a:pPr>
             <a:r>
@@ -2440,7 +2217,7 @@
             <a:endParaRPr lang="en-US" sz="1400" dirty="0"/>
           </a:p>
           <a:p>
-            <a:pPr algn="l" indent="0" marL="0">
+            <a:pPr marL="0" indent="0" algn="l">
               <a:buNone/>
             </a:pPr>
             <a:r>
@@ -2474,6 +2251,7 @@
         <a:solidFill>
           <a:srgbClr val="F5F5F5"/>
         </a:solidFill>
+        <a:effectLst/>
       </p:bgPr>
     </p:bg>
     <p:spTree>
@@ -2514,6 +2292,13 @@
             <a:prstDash val="solid"/>
           </a:ln>
         </p:spPr>
+        <p:txBody>
+          <a:bodyPr/>
+          <a:lstStyle/>
+          <a:p>
+            <a:endParaRPr lang="sv-SE"/>
+          </a:p>
+        </p:txBody>
       </p:sp>
       <p:sp>
         <p:nvSpPr>
@@ -2536,7 +2321,7 @@
           <a:bodyPr wrap="square" lIns="0" tIns="0" rIns="0" bIns="0" rtlCol="0" anchor="ctr"/>
           <a:lstStyle/>
           <a:p>
-            <a:pPr algn="l" indent="0" marL="0">
+            <a:pPr marL="0" indent="0" algn="l">
               <a:buNone/>
             </a:pPr>
             <a:r>
@@ -2578,6 +2363,13 @@
             <a:prstDash val="solid"/>
           </a:ln>
         </p:spPr>
+        <p:txBody>
+          <a:bodyPr/>
+          <a:lstStyle/>
+          <a:p>
+            <a:endParaRPr lang="sv-SE"/>
+          </a:p>
+        </p:txBody>
       </p:sp>
       <p:sp>
         <p:nvSpPr>
@@ -2603,13 +2395,20 @@
             <a:prstDash val="solid"/>
           </a:ln>
           <a:effectLst>
-            <a:outerShdw sx="100000" sy="100000" kx="0" ky="0" algn="bl" rotWithShape="0" blurRad="101600" dist="38100" dir="8100000">
+            <a:outerShdw blurRad="101600" dist="38100" dir="8100000" algn="bl" rotWithShape="0">
               <a:srgbClr val="000000">
                 <a:alpha val="12000"/>
               </a:srgbClr>
             </a:outerShdw>
           </a:effectLst>
         </p:spPr>
+        <p:txBody>
+          <a:bodyPr/>
+          <a:lstStyle/>
+          <a:p>
+            <a:endParaRPr lang="sv-SE"/>
+          </a:p>
+        </p:txBody>
       </p:sp>
       <p:sp>
         <p:nvSpPr>
@@ -2632,7 +2431,7 @@
           <a:bodyPr wrap="square" lIns="0" tIns="0" rIns="0" bIns="0" rtlCol="0" anchor="t"/>
           <a:lstStyle/>
           <a:p>
-            <a:pPr indent="0" marL="0">
+            <a:pPr marL="0" indent="0">
               <a:buNone/>
             </a:pPr>
             <a:r>
@@ -2649,7 +2448,7 @@
             <a:endParaRPr lang="en-US" sz="1200" dirty="0"/>
           </a:p>
           <a:p>
-            <a:pPr indent="0" marL="0">
+            <a:pPr marL="0" indent="0">
               <a:buNone/>
             </a:pPr>
             <a:r>
@@ -2666,7 +2465,7 @@
             <a:endParaRPr lang="en-US" sz="1200" dirty="0"/>
           </a:p>
           <a:p>
-            <a:pPr indent="0" marL="0">
+            <a:pPr marL="0" indent="0">
               <a:buNone/>
             </a:pPr>
             <a:r>
@@ -2683,7 +2482,7 @@
             <a:endParaRPr lang="en-US" sz="1200" dirty="0"/>
           </a:p>
           <a:p>
-            <a:pPr indent="0" marL="0">
+            <a:pPr marL="0" indent="0">
               <a:buNone/>
             </a:pPr>
             <a:r>
@@ -2700,7 +2499,7 @@
             <a:endParaRPr lang="en-US" sz="1200" dirty="0"/>
           </a:p>
           <a:p>
-            <a:pPr indent="0" marL="0">
+            <a:pPr marL="0" indent="0">
               <a:buNone/>
             </a:pPr>
             <a:r>
@@ -2717,7 +2516,7 @@
             <a:endParaRPr lang="en-US" sz="1200" dirty="0"/>
           </a:p>
           <a:p>
-            <a:pPr indent="0" marL="0">
+            <a:pPr marL="0" indent="0">
               <a:buNone/>
             </a:pPr>
             <a:r>
@@ -2734,7 +2533,7 @@
             <a:endParaRPr lang="en-US" sz="1200" dirty="0"/>
           </a:p>
           <a:p>
-            <a:pPr indent="0" marL="0">
+            <a:pPr marL="0" indent="0">
               <a:buNone/>
             </a:pPr>
             <a:r>
@@ -2751,7 +2550,7 @@
             <a:endParaRPr lang="en-US" sz="1200" dirty="0"/>
           </a:p>
           <a:p>
-            <a:pPr indent="0" marL="0">
+            <a:pPr marL="0" indent="0">
               <a:buNone/>
             </a:pPr>
             <a:r>
@@ -2768,7 +2567,7 @@
             <a:endParaRPr lang="en-US" sz="1200" dirty="0"/>
           </a:p>
           <a:p>
-            <a:pPr indent="0" marL="0">
+            <a:pPr marL="0" indent="0">
               <a:buNone/>
             </a:pPr>
             <a:r>
@@ -2785,7 +2584,7 @@
             <a:endParaRPr lang="en-US" sz="1200" dirty="0"/>
           </a:p>
           <a:p>
-            <a:pPr indent="0" marL="0">
+            <a:pPr marL="0" indent="0">
               <a:buNone/>
             </a:pPr>
             <a:r>
@@ -2802,7 +2601,7 @@
             <a:endParaRPr lang="en-US" sz="1200" dirty="0"/>
           </a:p>
           <a:p>
-            <a:pPr indent="0" marL="0">
+            <a:pPr marL="0" indent="0">
               <a:buNone/>
             </a:pPr>
             <a:r>
@@ -2819,13 +2618,13 @@
             <a:endParaRPr lang="en-US" sz="1200" dirty="0"/>
           </a:p>
           <a:p>
-            <a:pPr indent="0" marL="0">
+            <a:pPr marL="0" indent="0">
               <a:buNone/>
             </a:pPr>
             <a:endParaRPr lang="en-US" sz="1200" dirty="0"/>
           </a:p>
           <a:p>
-            <a:pPr indent="0" marL="0">
+            <a:pPr marL="0" indent="0">
               <a:buNone/>
             </a:pPr>
             <a:r>
@@ -2842,7 +2641,7 @@
             <a:endParaRPr lang="en-US" sz="1200" dirty="0"/>
           </a:p>
           <a:p>
-            <a:pPr indent="0" marL="0">
+            <a:pPr marL="0" indent="0">
               <a:buNone/>
             </a:pPr>
             <a:r>
@@ -2859,13 +2658,13 @@
             <a:endParaRPr lang="en-US" sz="1200" dirty="0"/>
           </a:p>
           <a:p>
-            <a:pPr indent="0" marL="0">
+            <a:pPr marL="0" indent="0">
               <a:buNone/>
             </a:pPr>
             <a:endParaRPr lang="en-US" sz="1200" dirty="0"/>
           </a:p>
           <a:p>
-            <a:pPr indent="0" marL="0">
+            <a:pPr marL="0" indent="0">
               <a:buNone/>
             </a:pPr>
             <a:r>
@@ -2882,7 +2681,7 @@
             <a:endParaRPr lang="en-US" sz="1200" dirty="0"/>
           </a:p>
           <a:p>
-            <a:pPr indent="0" marL="0">
+            <a:pPr marL="0" indent="0">
               <a:buNone/>
             </a:pPr>
             <a:r>
@@ -2980,6 +2779,7 @@
         <a:solidFill>
           <a:srgbClr val="F5F5F5"/>
         </a:solidFill>
+        <a:effectLst/>
       </p:bgPr>
     </p:bg>
     <p:spTree>
@@ -3020,6 +2820,13 @@
             <a:prstDash val="solid"/>
           </a:ln>
         </p:spPr>
+        <p:txBody>
+          <a:bodyPr/>
+          <a:lstStyle/>
+          <a:p>
+            <a:endParaRPr lang="sv-SE"/>
+          </a:p>
+        </p:txBody>
       </p:sp>
       <p:sp>
         <p:nvSpPr>
@@ -3042,7 +2849,7 @@
           <a:bodyPr wrap="square" lIns="0" tIns="0" rIns="0" bIns="0" rtlCol="0" anchor="ctr"/>
           <a:lstStyle/>
           <a:p>
-            <a:pPr algn="l" indent="0" marL="0">
+            <a:pPr marL="0" indent="0" algn="l">
               <a:buNone/>
             </a:pPr>
             <a:r>
@@ -3084,6 +2891,13 @@
             <a:prstDash val="solid"/>
           </a:ln>
         </p:spPr>
+        <p:txBody>
+          <a:bodyPr/>
+          <a:lstStyle/>
+          <a:p>
+            <a:endParaRPr lang="sv-SE"/>
+          </a:p>
+        </p:txBody>
       </p:sp>
       <p:sp>
         <p:nvSpPr>
@@ -3109,13 +2923,20 @@
             <a:prstDash val="solid"/>
           </a:ln>
           <a:effectLst>
-            <a:outerShdw sx="100000" sy="100000" kx="0" ky="0" algn="bl" rotWithShape="0" blurRad="101600" dist="38100" dir="8100000">
+            <a:outerShdw blurRad="101600" dist="38100" dir="8100000" algn="bl" rotWithShape="0">
               <a:srgbClr val="000000">
                 <a:alpha val="12000"/>
               </a:srgbClr>
             </a:outerShdw>
           </a:effectLst>
         </p:spPr>
+        <p:txBody>
+          <a:bodyPr/>
+          <a:lstStyle/>
+          <a:p>
+            <a:endParaRPr lang="sv-SE"/>
+          </a:p>
+        </p:txBody>
       </p:sp>
       <p:sp>
         <p:nvSpPr>
@@ -3138,7 +2959,7 @@
           <a:bodyPr wrap="square" lIns="0" tIns="0" rIns="0" bIns="0" rtlCol="0" anchor="t"/>
           <a:lstStyle/>
           <a:p>
-            <a:pPr indent="0" marL="0">
+            <a:pPr marL="0" indent="0">
               <a:buNone/>
             </a:pPr>
             <a:r>
@@ -3155,7 +2976,7 @@
             <a:endParaRPr lang="en-US" sz="1200" dirty="0"/>
           </a:p>
           <a:p>
-            <a:pPr indent="0" marL="0">
+            <a:pPr marL="0" indent="0">
               <a:buNone/>
             </a:pPr>
             <a:r>
@@ -3172,7 +2993,7 @@
             <a:endParaRPr lang="en-US" sz="1200" dirty="0"/>
           </a:p>
           <a:p>
-            <a:pPr indent="0" marL="0">
+            <a:pPr marL="0" indent="0">
               <a:buNone/>
             </a:pPr>
             <a:r>
@@ -3189,7 +3010,7 @@
             <a:endParaRPr lang="en-US" sz="1200" dirty="0"/>
           </a:p>
           <a:p>
-            <a:pPr indent="0" marL="0">
+            <a:pPr marL="0" indent="0">
               <a:buNone/>
             </a:pPr>
             <a:r>
@@ -3206,13 +3027,13 @@
             <a:endParaRPr lang="en-US" sz="1200" dirty="0"/>
           </a:p>
           <a:p>
-            <a:pPr indent="0" marL="0">
+            <a:pPr marL="0" indent="0">
               <a:buNone/>
             </a:pPr>
             <a:endParaRPr lang="en-US" sz="1200" dirty="0"/>
           </a:p>
           <a:p>
-            <a:pPr indent="0" marL="0">
+            <a:pPr marL="0" indent="0">
               <a:buNone/>
             </a:pPr>
             <a:r>
@@ -3229,7 +3050,7 @@
             <a:endParaRPr lang="en-US" sz="1200" dirty="0"/>
           </a:p>
           <a:p>
-            <a:pPr indent="0" marL="0">
+            <a:pPr marL="0" indent="0">
               <a:buNone/>
             </a:pPr>
             <a:r>
@@ -3246,7 +3067,7 @@
             <a:endParaRPr lang="en-US" sz="1200" dirty="0"/>
           </a:p>
           <a:p>
-            <a:pPr indent="0" marL="0">
+            <a:pPr marL="0" indent="0">
               <a:buNone/>
             </a:pPr>
             <a:r>
@@ -3263,7 +3084,7 @@
             <a:endParaRPr lang="en-US" sz="1200" dirty="0"/>
           </a:p>
           <a:p>
-            <a:pPr indent="0" marL="0">
+            <a:pPr marL="0" indent="0">
               <a:buNone/>
             </a:pPr>
             <a:r>
@@ -3280,7 +3101,7 @@
             <a:endParaRPr lang="en-US" sz="1200" dirty="0"/>
           </a:p>
           <a:p>
-            <a:pPr indent="0" marL="0">
+            <a:pPr marL="0" indent="0">
               <a:buNone/>
             </a:pPr>
             <a:r>
@@ -3297,7 +3118,7 @@
             <a:endParaRPr lang="en-US" sz="1200" dirty="0"/>
           </a:p>
           <a:p>
-            <a:pPr indent="0" marL="0">
+            <a:pPr marL="0" indent="0">
               <a:buNone/>
             </a:pPr>
             <a:r>
@@ -3314,7 +3135,7 @@
             <a:endParaRPr lang="en-US" sz="1200" dirty="0"/>
           </a:p>
           <a:p>
-            <a:pPr indent="0" marL="0">
+            <a:pPr marL="0" indent="0">
               <a:buNone/>
             </a:pPr>
             <a:r>
@@ -3331,7 +3152,7 @@
             <a:endParaRPr lang="en-US" sz="1200" dirty="0"/>
           </a:p>
           <a:p>
-            <a:pPr indent="0" marL="0">
+            <a:pPr marL="0" indent="0">
               <a:buNone/>
             </a:pPr>
             <a:r>
@@ -3348,7 +3169,7 @@
             <a:endParaRPr lang="en-US" sz="1200" dirty="0"/>
           </a:p>
           <a:p>
-            <a:pPr indent="0" marL="0">
+            <a:pPr marL="0" indent="0">
               <a:buNone/>
             </a:pPr>
             <a:r>
@@ -3365,13 +3186,13 @@
             <a:endParaRPr lang="en-US" sz="1200" dirty="0"/>
           </a:p>
           <a:p>
-            <a:pPr indent="0" marL="0">
+            <a:pPr marL="0" indent="0">
               <a:buNone/>
             </a:pPr>
             <a:endParaRPr lang="en-US" sz="1200" dirty="0"/>
           </a:p>
           <a:p>
-            <a:pPr indent="0" marL="0">
+            <a:pPr marL="0" indent="0">
               <a:buNone/>
             </a:pPr>
             <a:r>
@@ -3388,7 +3209,7 @@
             <a:endParaRPr lang="en-US" sz="1200" dirty="0"/>
           </a:p>
           <a:p>
-            <a:pPr indent="0" marL="0">
+            <a:pPr marL="0" indent="0">
               <a:buNone/>
             </a:pPr>
             <a:r>
@@ -3405,7 +3226,7 @@
             <a:endParaRPr lang="en-US" sz="1200" dirty="0"/>
           </a:p>
           <a:p>
-            <a:pPr indent="0" marL="0">
+            <a:pPr marL="0" indent="0">
               <a:buNone/>
             </a:pPr>
             <a:r>
@@ -3422,7 +3243,7 @@
             <a:endParaRPr lang="en-US" sz="1200" dirty="0"/>
           </a:p>
           <a:p>
-            <a:pPr indent="0" marL="0">
+            <a:pPr marL="0" indent="0">
               <a:buNone/>
             </a:pPr>
             <a:r>
@@ -3439,7 +3260,7 @@
             <a:endParaRPr lang="en-US" sz="1200" dirty="0"/>
           </a:p>
           <a:p>
-            <a:pPr indent="0" marL="0">
+            <a:pPr marL="0" indent="0">
               <a:buNone/>
             </a:pPr>
             <a:r>
@@ -3473,6 +3294,7 @@
         <a:solidFill>
           <a:srgbClr val="F5F5F5"/>
         </a:solidFill>
+        <a:effectLst/>
       </p:bgPr>
     </p:bg>
     <p:spTree>
@@ -3513,6 +3335,13 @@
             <a:prstDash val="solid"/>
           </a:ln>
         </p:spPr>
+        <p:txBody>
+          <a:bodyPr/>
+          <a:lstStyle/>
+          <a:p>
+            <a:endParaRPr lang="sv-SE"/>
+          </a:p>
+        </p:txBody>
       </p:sp>
       <p:sp>
         <p:nvSpPr>
@@ -3535,7 +3364,7 @@
           <a:bodyPr wrap="square" lIns="0" tIns="0" rIns="0" bIns="0" rtlCol="0" anchor="ctr"/>
           <a:lstStyle/>
           <a:p>
-            <a:pPr algn="l" indent="0" marL="0">
+            <a:pPr marL="0" indent="0" algn="l">
               <a:buNone/>
             </a:pPr>
             <a:r>
@@ -3577,6 +3406,13 @@
             <a:prstDash val="solid"/>
           </a:ln>
         </p:spPr>
+        <p:txBody>
+          <a:bodyPr/>
+          <a:lstStyle/>
+          <a:p>
+            <a:endParaRPr lang="sv-SE"/>
+          </a:p>
+        </p:txBody>
       </p:sp>
       <p:sp>
         <p:nvSpPr>
@@ -3602,13 +3438,20 @@
             <a:prstDash val="solid"/>
           </a:ln>
           <a:effectLst>
-            <a:outerShdw sx="100000" sy="100000" kx="0" ky="0" algn="bl" rotWithShape="0" blurRad="101600" dist="38100" dir="8100000">
+            <a:outerShdw blurRad="101600" dist="38100" dir="8100000" algn="bl" rotWithShape="0">
               <a:srgbClr val="000000">
                 <a:alpha val="12000"/>
               </a:srgbClr>
             </a:outerShdw>
           </a:effectLst>
         </p:spPr>
+        <p:txBody>
+          <a:bodyPr/>
+          <a:lstStyle/>
+          <a:p>
+            <a:endParaRPr lang="sv-SE"/>
+          </a:p>
+        </p:txBody>
       </p:sp>
       <p:sp>
         <p:nvSpPr>
@@ -3631,7 +3474,7 @@
           <a:bodyPr wrap="square" lIns="0" tIns="0" rIns="0" bIns="0" rtlCol="0" anchor="t"/>
           <a:lstStyle/>
           <a:p>
-            <a:pPr indent="0" marL="0">
+            <a:pPr marL="0" indent="0">
               <a:buNone/>
             </a:pPr>
             <a:r>
@@ -3648,7 +3491,7 @@
             <a:endParaRPr lang="en-US" sz="1200" dirty="0"/>
           </a:p>
           <a:p>
-            <a:pPr indent="0" marL="0">
+            <a:pPr marL="0" indent="0">
               <a:buNone/>
             </a:pPr>
             <a:r>
@@ -3665,13 +3508,13 @@
             <a:endParaRPr lang="en-US" sz="1200" dirty="0"/>
           </a:p>
           <a:p>
-            <a:pPr indent="0" marL="0">
+            <a:pPr marL="0" indent="0">
               <a:buNone/>
             </a:pPr>
             <a:endParaRPr lang="en-US" sz="1200" dirty="0"/>
           </a:p>
           <a:p>
-            <a:pPr indent="0" marL="0">
+            <a:pPr marL="0" indent="0">
               <a:buNone/>
             </a:pPr>
             <a:r>
@@ -3688,7 +3531,7 @@
             <a:endParaRPr lang="en-US" sz="1200" dirty="0"/>
           </a:p>
           <a:p>
-            <a:pPr indent="0" marL="0">
+            <a:pPr marL="0" indent="0">
               <a:buNone/>
             </a:pPr>
             <a:r>
@@ -3705,7 +3548,7 @@
             <a:endParaRPr lang="en-US" sz="1200" dirty="0"/>
           </a:p>
           <a:p>
-            <a:pPr indent="0" marL="0">
+            <a:pPr marL="0" indent="0">
               <a:buNone/>
             </a:pPr>
             <a:r>
@@ -3722,7 +3565,7 @@
             <a:endParaRPr lang="en-US" sz="1200" dirty="0"/>
           </a:p>
           <a:p>
-            <a:pPr indent="0" marL="0">
+            <a:pPr marL="0" indent="0">
               <a:buNone/>
             </a:pPr>
             <a:r>
@@ -3739,7 +3582,7 @@
             <a:endParaRPr lang="en-US" sz="1200" dirty="0"/>
           </a:p>
           <a:p>
-            <a:pPr indent="0" marL="0">
+            <a:pPr marL="0" indent="0">
               <a:buNone/>
             </a:pPr>
             <a:r>
@@ -3756,13 +3599,13 @@
             <a:endParaRPr lang="en-US" sz="1200" dirty="0"/>
           </a:p>
           <a:p>
-            <a:pPr indent="0" marL="0">
+            <a:pPr marL="0" indent="0">
               <a:buNone/>
             </a:pPr>
             <a:endParaRPr lang="en-US" sz="1200" dirty="0"/>
           </a:p>
           <a:p>
-            <a:pPr indent="0" marL="0">
+            <a:pPr marL="0" indent="0">
               <a:buNone/>
             </a:pPr>
             <a:r>
@@ -3779,7 +3622,7 @@
             <a:endParaRPr lang="en-US" sz="1200" dirty="0"/>
           </a:p>
           <a:p>
-            <a:pPr indent="0" marL="0">
+            <a:pPr marL="0" indent="0">
               <a:buNone/>
             </a:pPr>
             <a:r>
@@ -3796,13 +3639,13 @@
             <a:endParaRPr lang="en-US" sz="1200" dirty="0"/>
           </a:p>
           <a:p>
-            <a:pPr indent="0" marL="0">
+            <a:pPr marL="0" indent="0">
               <a:buNone/>
             </a:pPr>
             <a:endParaRPr lang="en-US" sz="1200" dirty="0"/>
           </a:p>
           <a:p>
-            <a:pPr indent="0" marL="0">
+            <a:pPr marL="0" indent="0">
               <a:buNone/>
             </a:pPr>
             <a:r>
@@ -3819,13 +3662,13 @@
             <a:endParaRPr lang="en-US" sz="1200" dirty="0"/>
           </a:p>
           <a:p>
-            <a:pPr indent="0" marL="0">
+            <a:pPr marL="0" indent="0">
               <a:buNone/>
             </a:pPr>
             <a:endParaRPr lang="en-US" sz="1200" dirty="0"/>
           </a:p>
           <a:p>
-            <a:pPr indent="0" marL="0">
+            <a:pPr marL="0" indent="0">
               <a:buNone/>
             </a:pPr>
             <a:r>
@@ -3842,7 +3685,7 @@
             <a:endParaRPr lang="en-US" sz="1200" dirty="0"/>
           </a:p>
           <a:p>
-            <a:pPr indent="0" marL="0">
+            <a:pPr marL="0" indent="0">
               <a:buNone/>
             </a:pPr>
             <a:r>
@@ -3859,7 +3702,7 @@
             <a:endParaRPr lang="en-US" sz="1200" dirty="0"/>
           </a:p>
           <a:p>
-            <a:pPr indent="0" marL="0">
+            <a:pPr marL="0" indent="0">
               <a:buNone/>
             </a:pPr>
             <a:r>
@@ -3876,7 +3719,7 @@
             <a:endParaRPr lang="en-US" sz="1200" dirty="0"/>
           </a:p>
           <a:p>
-            <a:pPr indent="0" marL="0">
+            <a:pPr marL="0" indent="0">
               <a:buNone/>
             </a:pPr>
             <a:r>
@@ -3893,7 +3736,7 @@
             <a:endParaRPr lang="en-US" sz="1200" dirty="0"/>
           </a:p>
           <a:p>
-            <a:pPr indent="0" marL="0">
+            <a:pPr marL="0" indent="0">
               <a:buNone/>
             </a:pPr>
             <a:r>
@@ -3910,7 +3753,7 @@
             <a:endParaRPr lang="en-US" sz="1200" dirty="0"/>
           </a:p>
           <a:p>
-            <a:pPr indent="0" marL="0">
+            <a:pPr marL="0" indent="0">
               <a:buNone/>
             </a:pPr>
             <a:r>
@@ -3927,7 +3770,7 @@
             <a:endParaRPr lang="en-US" sz="1200" dirty="0"/>
           </a:p>
           <a:p>
-            <a:pPr indent="0" marL="0">
+            <a:pPr marL="0" indent="0">
               <a:buNone/>
             </a:pPr>
             <a:r>
@@ -3961,6 +3804,7 @@
         <a:solidFill>
           <a:srgbClr val="F5F5F5"/>
         </a:solidFill>
+        <a:effectLst/>
       </p:bgPr>
     </p:bg>
     <p:spTree>
@@ -4001,6 +3845,13 @@
             <a:prstDash val="solid"/>
           </a:ln>
         </p:spPr>
+        <p:txBody>
+          <a:bodyPr/>
+          <a:lstStyle/>
+          <a:p>
+            <a:endParaRPr lang="sv-SE"/>
+          </a:p>
+        </p:txBody>
       </p:sp>
       <p:sp>
         <p:nvSpPr>
@@ -4023,7 +3874,7 @@
           <a:bodyPr wrap="square" lIns="0" tIns="0" rIns="0" bIns="0" rtlCol="0" anchor="ctr"/>
           <a:lstStyle/>
           <a:p>
-            <a:pPr algn="l" indent="0" marL="0">
+            <a:pPr marL="0" indent="0" algn="l">
               <a:buNone/>
             </a:pPr>
             <a:r>
@@ -4065,6 +3916,13 @@
             <a:prstDash val="solid"/>
           </a:ln>
         </p:spPr>
+        <p:txBody>
+          <a:bodyPr/>
+          <a:lstStyle/>
+          <a:p>
+            <a:endParaRPr lang="sv-SE"/>
+          </a:p>
+        </p:txBody>
       </p:sp>
       <p:sp>
         <p:nvSpPr>
@@ -4090,13 +3948,20 @@
             <a:prstDash val="solid"/>
           </a:ln>
           <a:effectLst>
-            <a:outerShdw sx="100000" sy="100000" kx="0" ky="0" algn="bl" rotWithShape="0" blurRad="101600" dist="38100" dir="8100000">
+            <a:outerShdw blurRad="101600" dist="38100" dir="8100000" algn="bl" rotWithShape="0">
               <a:srgbClr val="000000">
                 <a:alpha val="12000"/>
               </a:srgbClr>
             </a:outerShdw>
           </a:effectLst>
         </p:spPr>
+        <p:txBody>
+          <a:bodyPr/>
+          <a:lstStyle/>
+          <a:p>
+            <a:endParaRPr lang="sv-SE"/>
+          </a:p>
+        </p:txBody>
       </p:sp>
       <p:sp>
         <p:nvSpPr>
@@ -4119,7 +3984,7 @@
           <a:bodyPr wrap="square" lIns="0" tIns="0" rIns="0" bIns="0" rtlCol="0" anchor="t"/>
           <a:lstStyle/>
           <a:p>
-            <a:pPr indent="0" marL="0">
+            <a:pPr marL="0" indent="0">
               <a:buNone/>
             </a:pPr>
             <a:r>
@@ -4136,7 +4001,7 @@
             <a:endParaRPr lang="en-US" sz="1200" dirty="0"/>
           </a:p>
           <a:p>
-            <a:pPr indent="0" marL="0">
+            <a:pPr marL="0" indent="0">
               <a:buNone/>
             </a:pPr>
             <a:r>
@@ -4153,13 +4018,13 @@
             <a:endParaRPr lang="en-US" sz="1200" dirty="0"/>
           </a:p>
           <a:p>
-            <a:pPr indent="0" marL="0">
+            <a:pPr marL="0" indent="0">
               <a:buNone/>
             </a:pPr>
             <a:endParaRPr lang="en-US" sz="1200" dirty="0"/>
           </a:p>
           <a:p>
-            <a:pPr indent="0" marL="0">
+            <a:pPr marL="0" indent="0">
               <a:buNone/>
             </a:pPr>
             <a:r>
@@ -4176,7 +4041,7 @@
             <a:endParaRPr lang="en-US" sz="1200" dirty="0"/>
           </a:p>
           <a:p>
-            <a:pPr indent="0" marL="0">
+            <a:pPr marL="0" indent="0">
               <a:buNone/>
             </a:pPr>
             <a:r>
@@ -4193,7 +4058,7 @@
             <a:endParaRPr lang="en-US" sz="1200" dirty="0"/>
           </a:p>
           <a:p>
-            <a:pPr indent="0" marL="0">
+            <a:pPr marL="0" indent="0">
               <a:buNone/>
             </a:pPr>
             <a:r>
@@ -4210,7 +4075,7 @@
             <a:endParaRPr lang="en-US" sz="1200" dirty="0"/>
           </a:p>
           <a:p>
-            <a:pPr indent="0" marL="0">
+            <a:pPr marL="0" indent="0">
               <a:buNone/>
             </a:pPr>
             <a:r>
@@ -4227,7 +4092,7 @@
             <a:endParaRPr lang="en-US" sz="1200" dirty="0"/>
           </a:p>
           <a:p>
-            <a:pPr indent="0" marL="0">
+            <a:pPr marL="0" indent="0">
               <a:buNone/>
             </a:pPr>
             <a:r>
@@ -4244,7 +4109,7 @@
             <a:endParaRPr lang="en-US" sz="1200" dirty="0"/>
           </a:p>
           <a:p>
-            <a:pPr indent="0" marL="0">
+            <a:pPr marL="0" indent="0">
               <a:buNone/>
             </a:pPr>
             <a:r>
@@ -4261,7 +4126,7 @@
             <a:endParaRPr lang="en-US" sz="1200" dirty="0"/>
           </a:p>
           <a:p>
-            <a:pPr indent="0" marL="0">
+            <a:pPr marL="0" indent="0">
               <a:buNone/>
             </a:pPr>
             <a:r>
@@ -4278,7 +4143,7 @@
             <a:endParaRPr lang="en-US" sz="1200" dirty="0"/>
           </a:p>
           <a:p>
-            <a:pPr indent="0" marL="0">
+            <a:pPr marL="0" indent="0">
               <a:buNone/>
             </a:pPr>
             <a:r>
@@ -4295,7 +4160,7 @@
             <a:endParaRPr lang="en-US" sz="1200" dirty="0"/>
           </a:p>
           <a:p>
-            <a:pPr indent="0" marL="0">
+            <a:pPr marL="0" indent="0">
               <a:buNone/>
             </a:pPr>
             <a:r>
@@ -4312,7 +4177,7 @@
             <a:endParaRPr lang="en-US" sz="1200" dirty="0"/>
           </a:p>
           <a:p>
-            <a:pPr indent="0" marL="0">
+            <a:pPr marL="0" indent="0">
               <a:buNone/>
             </a:pPr>
             <a:r>
@@ -4329,13 +4194,13 @@
             <a:endParaRPr lang="en-US" sz="1200" dirty="0"/>
           </a:p>
           <a:p>
-            <a:pPr indent="0" marL="0">
+            <a:pPr marL="0" indent="0">
               <a:buNone/>
             </a:pPr>
             <a:endParaRPr lang="en-US" sz="1200" dirty="0"/>
           </a:p>
           <a:p>
-            <a:pPr indent="0" marL="0">
+            <a:pPr marL="0" indent="0">
               <a:buNone/>
             </a:pPr>
             <a:r>
@@ -4352,7 +4217,7 @@
             <a:endParaRPr lang="en-US" sz="1200" dirty="0"/>
           </a:p>
           <a:p>
-            <a:pPr indent="0" marL="0">
+            <a:pPr marL="0" indent="0">
               <a:buNone/>
             </a:pPr>
             <a:r>
@@ -4369,7 +4234,7 @@
             <a:endParaRPr lang="en-US" sz="1200" dirty="0"/>
           </a:p>
           <a:p>
-            <a:pPr indent="0" marL="0">
+            <a:pPr marL="0" indent="0">
               <a:buNone/>
             </a:pPr>
             <a:r>
@@ -4386,7 +4251,7 @@
             <a:endParaRPr lang="en-US" sz="1200" dirty="0"/>
           </a:p>
           <a:p>
-            <a:pPr indent="0" marL="0">
+            <a:pPr marL="0" indent="0">
               <a:buNone/>
             </a:pPr>
             <a:r>
@@ -4403,7 +4268,7 @@
             <a:endParaRPr lang="en-US" sz="1200" dirty="0"/>
           </a:p>
           <a:p>
-            <a:pPr indent="0" marL="0">
+            <a:pPr marL="0" indent="0">
               <a:buNone/>
             </a:pPr>
             <a:r>
@@ -4420,7 +4285,7 @@
             <a:endParaRPr lang="en-US" sz="1200" dirty="0"/>
           </a:p>
           <a:p>
-            <a:pPr indent="0" marL="0">
+            <a:pPr marL="0" indent="0">
               <a:buNone/>
             </a:pPr>
             <a:r>
@@ -4437,7 +4302,7 @@
             <a:endParaRPr lang="en-US" sz="1200" dirty="0"/>
           </a:p>
           <a:p>
-            <a:pPr indent="0" marL="0">
+            <a:pPr marL="0" indent="0">
               <a:buNone/>
             </a:pPr>
             <a:r>
@@ -4454,7 +4319,7 @@
             <a:endParaRPr lang="en-US" sz="1200" dirty="0"/>
           </a:p>
           <a:p>
-            <a:pPr indent="0" marL="0">
+            <a:pPr marL="0" indent="0">
               <a:buNone/>
             </a:pPr>
             <a:r>
@@ -4488,6 +4353,7 @@
         <a:solidFill>
           <a:srgbClr val="F5F5F5"/>
         </a:solidFill>
+        <a:effectLst/>
       </p:bgPr>
     </p:bg>
     <p:spTree>
@@ -4528,6 +4394,13 @@
             <a:prstDash val="solid"/>
           </a:ln>
         </p:spPr>
+        <p:txBody>
+          <a:bodyPr/>
+          <a:lstStyle/>
+          <a:p>
+            <a:endParaRPr lang="sv-SE"/>
+          </a:p>
+        </p:txBody>
       </p:sp>
       <p:sp>
         <p:nvSpPr>
@@ -4550,7 +4423,7 @@
           <a:bodyPr wrap="square" lIns="0" tIns="0" rIns="0" bIns="0" rtlCol="0" anchor="ctr"/>
           <a:lstStyle/>
           <a:p>
-            <a:pPr algn="l" indent="0" marL="0">
+            <a:pPr marL="0" indent="0" algn="l">
               <a:buNone/>
             </a:pPr>
             <a:r>
@@ -4592,6 +4465,13 @@
             <a:prstDash val="solid"/>
           </a:ln>
         </p:spPr>
+        <p:txBody>
+          <a:bodyPr/>
+          <a:lstStyle/>
+          <a:p>
+            <a:endParaRPr lang="sv-SE"/>
+          </a:p>
+        </p:txBody>
       </p:sp>
       <p:sp>
         <p:nvSpPr>
@@ -4614,7 +4494,7 @@
           <a:bodyPr wrap="square" lIns="0" tIns="0" rIns="0" bIns="0" rtlCol="0" anchor="ctr"/>
           <a:lstStyle/>
           <a:p>
-            <a:pPr indent="0" marL="0">
+            <a:pPr marL="0" indent="0">
               <a:buNone/>
             </a:pPr>
             <a:r>
@@ -4653,7 +4533,7 @@
           <a:bodyPr wrap="square" lIns="0" tIns="0" rIns="0" bIns="0" rtlCol="0" anchor="ctr"/>
           <a:lstStyle/>
           <a:p>
-            <a:pPr indent="0" marL="0">
+            <a:pPr marL="0" indent="0">
               <a:buNone/>
             </a:pPr>
             <a:r>
@@ -4886,6 +4766,13 @@
             <a:prstDash val="solid"/>
           </a:ln>
         </p:spPr>
+        <p:txBody>
+          <a:bodyPr/>
+          <a:lstStyle/>
+          <a:p>
+            <a:endParaRPr lang="sv-SE"/>
+          </a:p>
+        </p:txBody>
       </p:sp>
       <p:sp>
         <p:nvSpPr>
@@ -4896,7 +4783,7 @@
         <p:spPr>
           <a:xfrm>
             <a:off x="457200" y="3291840"/>
-            <a:ext cx="8229600" cy="1554480"/>
+            <a:ext cx="8229600" cy="2098900"/>
           </a:xfrm>
           <a:prstGeom prst="rect">
             <a:avLst/>
@@ -4911,13 +4798,20 @@
             <a:prstDash val="solid"/>
           </a:ln>
           <a:effectLst>
-            <a:outerShdw sx="100000" sy="100000" kx="0" ky="0" algn="bl" rotWithShape="0" blurRad="101600" dist="38100" dir="8100000">
+            <a:outerShdw blurRad="101600" dist="38100" dir="8100000" algn="bl" rotWithShape="0">
               <a:srgbClr val="000000">
                 <a:alpha val="12000"/>
               </a:srgbClr>
             </a:outerShdw>
           </a:effectLst>
         </p:spPr>
+        <p:txBody>
+          <a:bodyPr/>
+          <a:lstStyle/>
+          <a:p>
+            <a:endParaRPr lang="sv-SE"/>
+          </a:p>
+        </p:txBody>
       </p:sp>
       <p:sp>
         <p:nvSpPr>
@@ -4928,7 +4822,7 @@
         <p:spPr>
           <a:xfrm>
             <a:off x="594360" y="3383280"/>
-            <a:ext cx="7955280" cy="1371600"/>
+            <a:ext cx="7955280" cy="1913206"/>
           </a:xfrm>
           <a:prstGeom prst="rect">
             <a:avLst/>
@@ -4940,7 +4834,7 @@
           <a:bodyPr wrap="square" lIns="0" tIns="0" rIns="0" bIns="0" rtlCol="0" anchor="t"/>
           <a:lstStyle/>
           <a:p>
-            <a:pPr indent="0" marL="0">
+            <a:pPr marL="0" indent="0">
               <a:buNone/>
             </a:pPr>
             <a:r>
@@ -4957,7 +4851,7 @@
             <a:endParaRPr lang="en-US" sz="1100" dirty="0"/>
           </a:p>
           <a:p>
-            <a:pPr indent="0" marL="0">
+            <a:pPr marL="0" indent="0">
               <a:buNone/>
             </a:pPr>
             <a:r>
@@ -4974,7 +4868,7 @@
             <a:endParaRPr lang="en-US" sz="1100" dirty="0"/>
           </a:p>
           <a:p>
-            <a:pPr indent="0" marL="0">
+            <a:pPr marL="0" indent="0">
               <a:buNone/>
             </a:pPr>
             <a:r>
@@ -4991,7 +4885,7 @@
             <a:endParaRPr lang="en-US" sz="1100" dirty="0"/>
           </a:p>
           <a:p>
-            <a:pPr indent="0" marL="0">
+            <a:pPr marL="0" indent="0">
               <a:buNone/>
             </a:pPr>
             <a:r>
@@ -5008,7 +4902,7 @@
             <a:endParaRPr lang="en-US" sz="1100" dirty="0"/>
           </a:p>
           <a:p>
-            <a:pPr indent="0" marL="0">
+            <a:pPr marL="0" indent="0">
               <a:buNone/>
             </a:pPr>
             <a:r>
@@ -5025,7 +4919,7 @@
             <a:endParaRPr lang="en-US" sz="1100" dirty="0"/>
           </a:p>
           <a:p>
-            <a:pPr indent="0" marL="0">
+            <a:pPr marL="0" indent="0">
               <a:buNone/>
             </a:pPr>
             <a:r>
@@ -5042,7 +4936,7 @@
             <a:endParaRPr lang="en-US" sz="1100" dirty="0"/>
           </a:p>
           <a:p>
-            <a:pPr indent="0" marL="0">
+            <a:pPr marL="0" indent="0">
               <a:buNone/>
             </a:pPr>
             <a:r>
@@ -5059,7 +4953,7 @@
             <a:endParaRPr lang="en-US" sz="1100" dirty="0"/>
           </a:p>
           <a:p>
-            <a:pPr indent="0" marL="0">
+            <a:pPr marL="0" indent="0">
               <a:buNone/>
             </a:pPr>
             <a:r>
@@ -5076,7 +4970,7 @@
             <a:endParaRPr lang="en-US" sz="1100" dirty="0"/>
           </a:p>
           <a:p>
-            <a:pPr indent="0" marL="0">
+            <a:pPr marL="0" indent="0">
               <a:buNone/>
             </a:pPr>
             <a:r>
@@ -5093,7 +4987,7 @@
             <a:endParaRPr lang="en-US" sz="1100" dirty="0"/>
           </a:p>
           <a:p>
-            <a:pPr indent="0" marL="0">
+            <a:pPr marL="0" indent="0">
               <a:buNone/>
             </a:pPr>
             <a:r>
@@ -5110,7 +5004,7 @@
             <a:endParaRPr lang="en-US" sz="1100" dirty="0"/>
           </a:p>
           <a:p>
-            <a:pPr indent="0" marL="0">
+            <a:pPr marL="0" indent="0">
               <a:buNone/>
             </a:pPr>
             <a:r>
@@ -5144,6 +5038,7 @@
         <a:solidFill>
           <a:srgbClr val="F5F5F5"/>
         </a:solidFill>
+        <a:effectLst/>
       </p:bgPr>
     </p:bg>
     <p:spTree>
@@ -5184,6 +5079,13 @@
             <a:prstDash val="solid"/>
           </a:ln>
         </p:spPr>
+        <p:txBody>
+          <a:bodyPr/>
+          <a:lstStyle/>
+          <a:p>
+            <a:endParaRPr lang="sv-SE"/>
+          </a:p>
+        </p:txBody>
       </p:sp>
       <p:sp>
         <p:nvSpPr>
@@ -5206,7 +5108,7 @@
           <a:bodyPr wrap="square" lIns="0" tIns="0" rIns="0" bIns="0" rtlCol="0" anchor="ctr"/>
           <a:lstStyle/>
           <a:p>
-            <a:pPr algn="l" indent="0" marL="0">
+            <a:pPr marL="0" indent="0" algn="l">
               <a:buNone/>
             </a:pPr>
             <a:r>
@@ -5248,6 +5150,13 @@
             <a:prstDash val="solid"/>
           </a:ln>
         </p:spPr>
+        <p:txBody>
+          <a:bodyPr/>
+          <a:lstStyle/>
+          <a:p>
+            <a:endParaRPr lang="sv-SE"/>
+          </a:p>
+        </p:txBody>
       </p:sp>
       <p:sp>
         <p:nvSpPr>
@@ -5412,7 +5321,29 @@
                 <a:ea typeface="Calibri" pitchFamily="34" charset="-122"/>
                 <a:cs typeface="Calibri" pitchFamily="34" charset="-120"/>
               </a:rPr>
-              <a:t>FluentAssertions (.Should().Be(...)) i .NET om laget gillar det — ökar läsbarhet</a:t>
+              <a:t>FluentAssertions (.Should().Be(...)) i .NET om </a:t>
+            </a:r>
+            <a:r>
+              <a:rPr lang="en-US" sz="1500" dirty="0" err="1">
+                <a:solidFill>
+                  <a:srgbClr val="1A1A1A"/>
+                </a:solidFill>
+                <a:latin typeface="Calibri" pitchFamily="34" charset="0"/>
+                <a:ea typeface="Calibri" pitchFamily="34" charset="-122"/>
+                <a:cs typeface="Calibri" pitchFamily="34" charset="-120"/>
+              </a:rPr>
+              <a:t>teamet</a:t>
+            </a:r>
+            <a:r>
+              <a:rPr lang="en-US" sz="1500" dirty="0">
+                <a:solidFill>
+                  <a:srgbClr val="1A1A1A"/>
+                </a:solidFill>
+                <a:latin typeface="Calibri" pitchFamily="34" charset="0"/>
+                <a:ea typeface="Calibri" pitchFamily="34" charset="-122"/>
+                <a:cs typeface="Calibri" pitchFamily="34" charset="-120"/>
+              </a:rPr>
+              <a:t> gillar det — ökar läsbarhet</a:t>
             </a:r>
             <a:endParaRPr lang="en-US" sz="1500" dirty="0"/>
           </a:p>
@@ -5434,6 +5365,7 @@
         <a:solidFill>
           <a:srgbClr val="232B2B"/>
         </a:solidFill>
+        <a:effectLst/>
       </p:bgPr>
     </p:bg>
     <p:spTree>
@@ -5474,6 +5406,13 @@
             <a:prstDash val="solid"/>
           </a:ln>
         </p:spPr>
+        <p:txBody>
+          <a:bodyPr/>
+          <a:lstStyle/>
+          <a:p>
+            <a:endParaRPr lang="sv-SE"/>
+          </a:p>
+        </p:txBody>
       </p:sp>
       <p:sp>
         <p:nvSpPr>
@@ -5496,7 +5435,7 @@
           <a:bodyPr wrap="square" lIns="0" tIns="0" rIns="0" bIns="0" rtlCol="0" anchor="ctr"/>
           <a:lstStyle/>
           <a:p>
-            <a:pPr algn="l" indent="0" marL="0">
+            <a:pPr marL="0" indent="0" algn="l">
               <a:buNone/>
             </a:pPr>
             <a:r>
@@ -5538,6 +5477,13 @@
             <a:prstDash val="solid"/>
           </a:ln>
         </p:spPr>
+        <p:txBody>
+          <a:bodyPr/>
+          <a:lstStyle/>
+          <a:p>
+            <a:endParaRPr lang="sv-SE"/>
+          </a:p>
+        </p:txBody>
       </p:sp>
       <p:sp>
         <p:nvSpPr>
@@ -5563,6 +5509,13 @@
             <a:prstDash val="solid"/>
           </a:ln>
         </p:spPr>
+        <p:txBody>
+          <a:bodyPr/>
+          <a:lstStyle/>
+          <a:p>
+            <a:endParaRPr lang="sv-SE"/>
+          </a:p>
+        </p:txBody>
       </p:sp>
       <p:sp>
         <p:nvSpPr>
@@ -5585,7 +5538,7 @@
           <a:bodyPr wrap="square" lIns="0" tIns="0" rIns="0" bIns="0" rtlCol="0" anchor="ctr"/>
           <a:lstStyle/>
           <a:p>
-            <a:pPr algn="ctr" indent="0" marL="0">
+            <a:pPr marL="0" indent="0" algn="ctr">
               <a:buNone/>
             </a:pPr>
             <a:r>
@@ -5621,7 +5574,7 @@
           <a:bodyPr wrap="square" lIns="0" tIns="0" rIns="0" bIns="0" rtlCol="0" anchor="t"/>
           <a:lstStyle/>
           <a:p>
-            <a:pPr indent="0" marL="0">
+            <a:pPr marL="0" indent="0">
               <a:buNone/>
             </a:pPr>
             <a:r>
@@ -5660,7 +5613,7 @@
           <a:bodyPr wrap="square" lIns="0" tIns="0" rIns="0" bIns="0" rtlCol="0" anchor="t"/>
           <a:lstStyle/>
           <a:p>
-            <a:pPr indent="0" marL="0">
+            <a:pPr marL="0" indent="0">
               <a:buNone/>
             </a:pPr>
             <a:r>
@@ -5702,6 +5655,13 @@
             <a:prstDash val="solid"/>
           </a:ln>
         </p:spPr>
+        <p:txBody>
+          <a:bodyPr/>
+          <a:lstStyle/>
+          <a:p>
+            <a:endParaRPr lang="sv-SE"/>
+          </a:p>
+        </p:txBody>
       </p:sp>
       <p:sp>
         <p:nvSpPr>
@@ -5724,7 +5684,7 @@
           <a:bodyPr wrap="square" lIns="0" tIns="0" rIns="0" bIns="0" rtlCol="0" anchor="ctr"/>
           <a:lstStyle/>
           <a:p>
-            <a:pPr algn="ctr" indent="0" marL="0">
+            <a:pPr marL="0" indent="0" algn="ctr">
               <a:buNone/>
             </a:pPr>
             <a:r>
@@ -5760,7 +5720,7 @@
           <a:bodyPr wrap="square" lIns="0" tIns="0" rIns="0" bIns="0" rtlCol="0" anchor="t"/>
           <a:lstStyle/>
           <a:p>
-            <a:pPr indent="0" marL="0">
+            <a:pPr marL="0" indent="0">
               <a:buNone/>
             </a:pPr>
             <a:r>
@@ -5799,7 +5759,7 @@
           <a:bodyPr wrap="square" lIns="0" tIns="0" rIns="0" bIns="0" rtlCol="0" anchor="t"/>
           <a:lstStyle/>
           <a:p>
-            <a:pPr indent="0" marL="0">
+            <a:pPr marL="0" indent="0">
               <a:buNone/>
             </a:pPr>
             <a:r>
@@ -5841,6 +5801,13 @@
             <a:prstDash val="solid"/>
           </a:ln>
         </p:spPr>
+        <p:txBody>
+          <a:bodyPr/>
+          <a:lstStyle/>
+          <a:p>
+            <a:endParaRPr lang="sv-SE"/>
+          </a:p>
+        </p:txBody>
       </p:sp>
       <p:sp>
         <p:nvSpPr>
@@ -5863,7 +5830,7 @@
           <a:bodyPr wrap="square" lIns="0" tIns="0" rIns="0" bIns="0" rtlCol="0" anchor="ctr"/>
           <a:lstStyle/>
           <a:p>
-            <a:pPr algn="ctr" indent="0" marL="0">
+            <a:pPr marL="0" indent="0" algn="ctr">
               <a:buNone/>
             </a:pPr>
             <a:r>
@@ -5899,7 +5866,7 @@
           <a:bodyPr wrap="square" lIns="0" tIns="0" rIns="0" bIns="0" rtlCol="0" anchor="t"/>
           <a:lstStyle/>
           <a:p>
-            <a:pPr indent="0" marL="0">
+            <a:pPr marL="0" indent="0">
               <a:buNone/>
             </a:pPr>
             <a:r>
@@ -5938,7 +5905,7 @@
           <a:bodyPr wrap="square" lIns="0" tIns="0" rIns="0" bIns="0" rtlCol="0" anchor="t"/>
           <a:lstStyle/>
           <a:p>
-            <a:pPr indent="0" marL="0">
+            <a:pPr marL="0" indent="0">
               <a:buNone/>
             </a:pPr>
             <a:r>
@@ -5980,6 +5947,13 @@
             <a:prstDash val="solid"/>
           </a:ln>
         </p:spPr>
+        <p:txBody>
+          <a:bodyPr/>
+          <a:lstStyle/>
+          <a:p>
+            <a:endParaRPr lang="sv-SE"/>
+          </a:p>
+        </p:txBody>
       </p:sp>
       <p:sp>
         <p:nvSpPr>
@@ -6002,7 +5976,7 @@
           <a:bodyPr wrap="square" lIns="0" tIns="0" rIns="0" bIns="0" rtlCol="0" anchor="ctr"/>
           <a:lstStyle/>
           <a:p>
-            <a:pPr algn="ctr" indent="0" marL="0">
+            <a:pPr marL="0" indent="0" algn="ctr">
               <a:buNone/>
             </a:pPr>
             <a:r>
@@ -6038,7 +6012,7 @@
           <a:bodyPr wrap="square" lIns="0" tIns="0" rIns="0" bIns="0" rtlCol="0" anchor="t"/>
           <a:lstStyle/>
           <a:p>
-            <a:pPr indent="0" marL="0">
+            <a:pPr marL="0" indent="0">
               <a:buNone/>
             </a:pPr>
             <a:r>
@@ -6077,7 +6051,7 @@
           <a:bodyPr wrap="square" lIns="0" tIns="0" rIns="0" bIns="0" rtlCol="0" anchor="t"/>
           <a:lstStyle/>
           <a:p>
-            <a:pPr indent="0" marL="0">
+            <a:pPr marL="0" indent="0">
               <a:buNone/>
             </a:pPr>
             <a:r>
@@ -6111,6 +6085,7 @@
         <a:solidFill>
           <a:srgbClr val="F5F5F5"/>
         </a:solidFill>
+        <a:effectLst/>
       </p:bgPr>
     </p:bg>
     <p:spTree>
@@ -6151,6 +6126,13 @@
             <a:prstDash val="solid"/>
           </a:ln>
         </p:spPr>
+        <p:txBody>
+          <a:bodyPr/>
+          <a:lstStyle/>
+          <a:p>
+            <a:endParaRPr lang="sv-SE"/>
+          </a:p>
+        </p:txBody>
       </p:sp>
       <p:sp>
         <p:nvSpPr>
@@ -6173,7 +6155,7 @@
           <a:bodyPr wrap="square" lIns="0" tIns="0" rIns="0" bIns="0" rtlCol="0" anchor="ctr"/>
           <a:lstStyle/>
           <a:p>
-            <a:pPr algn="l" indent="0" marL="0">
+            <a:pPr marL="0" indent="0" algn="l">
               <a:buNone/>
             </a:pPr>
             <a:r>
@@ -6215,6 +6197,13 @@
             <a:prstDash val="solid"/>
           </a:ln>
         </p:spPr>
+        <p:txBody>
+          <a:bodyPr/>
+          <a:lstStyle/>
+          <a:p>
+            <a:endParaRPr lang="sv-SE"/>
+          </a:p>
+        </p:txBody>
       </p:sp>
       <p:sp>
         <p:nvSpPr>
@@ -6237,7 +6226,7 @@
           <a:bodyPr wrap="square" lIns="0" tIns="0" rIns="0" bIns="0" rtlCol="0" anchor="ctr"/>
           <a:lstStyle/>
           <a:p>
-            <a:pPr indent="0" marL="0">
+            <a:pPr marL="0" indent="0">
               <a:buNone/>
             </a:pPr>
             <a:r>
@@ -6276,7 +6265,7 @@
           <a:bodyPr wrap="square" lIns="0" tIns="0" rIns="0" bIns="0" rtlCol="0" anchor="ctr"/>
           <a:lstStyle/>
           <a:p>
-            <a:pPr indent="0" marL="0">
+            <a:pPr marL="0" indent="0">
               <a:buNone/>
             </a:pPr>
             <a:r>
@@ -6551,6 +6540,13 @@
             <a:prstDash val="solid"/>
           </a:ln>
         </p:spPr>
+        <p:txBody>
+          <a:bodyPr/>
+          <a:lstStyle/>
+          <a:p>
+            <a:endParaRPr lang="sv-SE"/>
+          </a:p>
+        </p:txBody>
       </p:sp>
       <p:sp>
         <p:nvSpPr>
@@ -6576,13 +6572,20 @@
             <a:prstDash val="solid"/>
           </a:ln>
           <a:effectLst>
-            <a:outerShdw sx="100000" sy="100000" kx="0" ky="0" algn="bl" rotWithShape="0" blurRad="101600" dist="38100" dir="8100000">
+            <a:outerShdw blurRad="101600" dist="38100" dir="8100000" algn="bl" rotWithShape="0">
               <a:srgbClr val="000000">
                 <a:alpha val="12000"/>
               </a:srgbClr>
             </a:outerShdw>
           </a:effectLst>
         </p:spPr>
+        <p:txBody>
+          <a:bodyPr/>
+          <a:lstStyle/>
+          <a:p>
+            <a:endParaRPr lang="sv-SE"/>
+          </a:p>
+        </p:txBody>
       </p:sp>
       <p:sp>
         <p:nvSpPr>
@@ -6605,7 +6608,7 @@
           <a:bodyPr wrap="square" lIns="0" tIns="0" rIns="0" bIns="0" rtlCol="0" anchor="ctr"/>
           <a:lstStyle/>
           <a:p>
-            <a:pPr algn="ctr" indent="0" marL="0">
+            <a:pPr marL="0" indent="0" algn="ctr">
               <a:buNone/>
             </a:pPr>
             <a:r>
@@ -6639,6 +6642,7 @@
         <a:solidFill>
           <a:srgbClr val="F5F5F5"/>
         </a:solidFill>
+        <a:effectLst/>
       </p:bgPr>
     </p:bg>
     <p:spTree>
@@ -6679,6 +6683,13 @@
             <a:prstDash val="solid"/>
           </a:ln>
         </p:spPr>
+        <p:txBody>
+          <a:bodyPr/>
+          <a:lstStyle/>
+          <a:p>
+            <a:endParaRPr lang="sv-SE"/>
+          </a:p>
+        </p:txBody>
       </p:sp>
       <p:sp>
         <p:nvSpPr>
@@ -6701,7 +6712,7 @@
           <a:bodyPr wrap="square" lIns="0" tIns="0" rIns="0" bIns="0" rtlCol="0" anchor="ctr"/>
           <a:lstStyle/>
           <a:p>
-            <a:pPr algn="l" indent="0" marL="0">
+            <a:pPr marL="0" indent="0" algn="l">
               <a:buNone/>
             </a:pPr>
             <a:r>
@@ -6743,6 +6754,13 @@
             <a:prstDash val="solid"/>
           </a:ln>
         </p:spPr>
+        <p:txBody>
+          <a:bodyPr/>
+          <a:lstStyle/>
+          <a:p>
+            <a:endParaRPr lang="sv-SE"/>
+          </a:p>
+        </p:txBody>
       </p:sp>
       <p:sp>
         <p:nvSpPr>
@@ -6768,13 +6786,20 @@
             <a:prstDash val="solid"/>
           </a:ln>
           <a:effectLst>
-            <a:outerShdw sx="100000" sy="100000" kx="0" ky="0" algn="bl" rotWithShape="0" blurRad="101600" dist="38100" dir="8100000">
+            <a:outerShdw blurRad="101600" dist="38100" dir="8100000" algn="bl" rotWithShape="0">
               <a:srgbClr val="000000">
                 <a:alpha val="12000"/>
               </a:srgbClr>
             </a:outerShdw>
           </a:effectLst>
         </p:spPr>
+        <p:txBody>
+          <a:bodyPr/>
+          <a:lstStyle/>
+          <a:p>
+            <a:endParaRPr lang="sv-SE"/>
+          </a:p>
+        </p:txBody>
       </p:sp>
       <p:sp>
         <p:nvSpPr>
@@ -6800,6 +6825,13 @@
             <a:prstDash val="solid"/>
           </a:ln>
         </p:spPr>
+        <p:txBody>
+          <a:bodyPr/>
+          <a:lstStyle/>
+          <a:p>
+            <a:endParaRPr lang="sv-SE"/>
+          </a:p>
+        </p:txBody>
       </p:sp>
       <p:sp>
         <p:nvSpPr>
@@ -6822,7 +6854,7 @@
           <a:bodyPr wrap="square" lIns="0" tIns="0" rIns="0" bIns="0" rtlCol="0" anchor="ctr"/>
           <a:lstStyle/>
           <a:p>
-            <a:pPr indent="0" marL="0">
+            <a:pPr marL="0" indent="0">
               <a:buNone/>
             </a:pPr>
             <a:r>
@@ -6861,7 +6893,7 @@
           <a:bodyPr wrap="square" lIns="0" tIns="0" rIns="0" bIns="0" rtlCol="0" anchor="t"/>
           <a:lstStyle/>
           <a:p>
-            <a:pPr indent="0" marL="0">
+            <a:pPr marL="0" indent="0">
               <a:buNone/>
             </a:pPr>
             <a:r>
@@ -6903,13 +6935,20 @@
             <a:prstDash val="solid"/>
           </a:ln>
           <a:effectLst>
-            <a:outerShdw sx="100000" sy="100000" kx="0" ky="0" algn="bl" rotWithShape="0" blurRad="101600" dist="38100" dir="8100000">
+            <a:outerShdw blurRad="101600" dist="38100" dir="8100000" algn="bl" rotWithShape="0">
               <a:srgbClr val="000000">
                 <a:alpha val="12000"/>
               </a:srgbClr>
             </a:outerShdw>
           </a:effectLst>
         </p:spPr>
+        <p:txBody>
+          <a:bodyPr/>
+          <a:lstStyle/>
+          <a:p>
+            <a:endParaRPr lang="sv-SE"/>
+          </a:p>
+        </p:txBody>
       </p:sp>
       <p:sp>
         <p:nvSpPr>
@@ -6935,6 +6974,13 @@
             <a:prstDash val="solid"/>
           </a:ln>
         </p:spPr>
+        <p:txBody>
+          <a:bodyPr/>
+          <a:lstStyle/>
+          <a:p>
+            <a:endParaRPr lang="sv-SE"/>
+          </a:p>
+        </p:txBody>
       </p:sp>
       <p:sp>
         <p:nvSpPr>
@@ -6957,7 +7003,7 @@
           <a:bodyPr wrap="square" lIns="0" tIns="0" rIns="0" bIns="0" rtlCol="0" anchor="ctr"/>
           <a:lstStyle/>
           <a:p>
-            <a:pPr indent="0" marL="0">
+            <a:pPr marL="0" indent="0">
               <a:buNone/>
             </a:pPr>
             <a:r>
@@ -6996,7 +7042,7 @@
           <a:bodyPr wrap="square" lIns="0" tIns="0" rIns="0" bIns="0" rtlCol="0" anchor="t"/>
           <a:lstStyle/>
           <a:p>
-            <a:pPr indent="0" marL="0">
+            <a:pPr marL="0" indent="0">
               <a:buNone/>
             </a:pPr>
             <a:r>
@@ -7038,13 +7084,20 @@
             <a:prstDash val="solid"/>
           </a:ln>
           <a:effectLst>
-            <a:outerShdw sx="100000" sy="100000" kx="0" ky="0" algn="bl" rotWithShape="0" blurRad="101600" dist="38100" dir="8100000">
+            <a:outerShdw blurRad="101600" dist="38100" dir="8100000" algn="bl" rotWithShape="0">
               <a:srgbClr val="000000">
                 <a:alpha val="12000"/>
               </a:srgbClr>
             </a:outerShdw>
           </a:effectLst>
         </p:spPr>
+        <p:txBody>
+          <a:bodyPr/>
+          <a:lstStyle/>
+          <a:p>
+            <a:endParaRPr lang="sv-SE"/>
+          </a:p>
+        </p:txBody>
       </p:sp>
       <p:sp>
         <p:nvSpPr>
@@ -7070,6 +7123,13 @@
             <a:prstDash val="solid"/>
           </a:ln>
         </p:spPr>
+        <p:txBody>
+          <a:bodyPr/>
+          <a:lstStyle/>
+          <a:p>
+            <a:endParaRPr lang="sv-SE"/>
+          </a:p>
+        </p:txBody>
       </p:sp>
       <p:sp>
         <p:nvSpPr>
@@ -7092,7 +7152,7 @@
           <a:bodyPr wrap="square" lIns="0" tIns="0" rIns="0" bIns="0" rtlCol="0" anchor="ctr"/>
           <a:lstStyle/>
           <a:p>
-            <a:pPr indent="0" marL="0">
+            <a:pPr marL="0" indent="0">
               <a:buNone/>
             </a:pPr>
             <a:r>
@@ -7131,7 +7191,7 @@
           <a:bodyPr wrap="square" lIns="0" tIns="0" rIns="0" bIns="0" rtlCol="0" anchor="t"/>
           <a:lstStyle/>
           <a:p>
-            <a:pPr indent="0" marL="0">
+            <a:pPr marL="0" indent="0">
               <a:buNone/>
             </a:pPr>
             <a:r>
@@ -7173,13 +7233,20 @@
             <a:prstDash val="solid"/>
           </a:ln>
           <a:effectLst>
-            <a:outerShdw sx="100000" sy="100000" kx="0" ky="0" algn="bl" rotWithShape="0" blurRad="101600" dist="38100" dir="8100000">
+            <a:outerShdw blurRad="101600" dist="38100" dir="8100000" algn="bl" rotWithShape="0">
               <a:srgbClr val="000000">
                 <a:alpha val="12000"/>
               </a:srgbClr>
             </a:outerShdw>
           </a:effectLst>
         </p:spPr>
+        <p:txBody>
+          <a:bodyPr/>
+          <a:lstStyle/>
+          <a:p>
+            <a:endParaRPr lang="sv-SE"/>
+          </a:p>
+        </p:txBody>
       </p:sp>
       <p:sp>
         <p:nvSpPr>
@@ -7205,6 +7272,13 @@
             <a:prstDash val="solid"/>
           </a:ln>
         </p:spPr>
+        <p:txBody>
+          <a:bodyPr/>
+          <a:lstStyle/>
+          <a:p>
+            <a:endParaRPr lang="sv-SE"/>
+          </a:p>
+        </p:txBody>
       </p:sp>
       <p:sp>
         <p:nvSpPr>
@@ -7227,7 +7301,7 @@
           <a:bodyPr wrap="square" lIns="0" tIns="0" rIns="0" bIns="0" rtlCol="0" anchor="ctr"/>
           <a:lstStyle/>
           <a:p>
-            <a:pPr indent="0" marL="0">
+            <a:pPr marL="0" indent="0">
               <a:buNone/>
             </a:pPr>
             <a:r>
@@ -7266,7 +7340,7 @@
           <a:bodyPr wrap="square" lIns="0" tIns="0" rIns="0" bIns="0" rtlCol="0" anchor="t"/>
           <a:lstStyle/>
           <a:p>
-            <a:pPr indent="0" marL="0">
+            <a:pPr marL="0" indent="0">
               <a:buNone/>
             </a:pPr>
             <a:r>
@@ -7305,7 +7379,7 @@
           <a:bodyPr wrap="square" lIns="0" tIns="0" rIns="0" bIns="0" rtlCol="0" anchor="ctr"/>
           <a:lstStyle/>
           <a:p>
-            <a:pPr algn="ctr" indent="0" marL="0">
+            <a:pPr marL="0" indent="0" algn="ctr">
               <a:buNone/>
             </a:pPr>
             <a:r>
@@ -7339,6 +7413,7 @@
         <a:solidFill>
           <a:srgbClr val="F5F5F5"/>
         </a:solidFill>
+        <a:effectLst/>
       </p:bgPr>
     </p:bg>
     <p:spTree>
@@ -7379,6 +7454,13 @@
             <a:prstDash val="solid"/>
           </a:ln>
         </p:spPr>
+        <p:txBody>
+          <a:bodyPr/>
+          <a:lstStyle/>
+          <a:p>
+            <a:endParaRPr lang="sv-SE"/>
+          </a:p>
+        </p:txBody>
       </p:sp>
       <p:sp>
         <p:nvSpPr>
@@ -7401,7 +7483,7 @@
           <a:bodyPr wrap="square" lIns="0" tIns="0" rIns="0" bIns="0" rtlCol="0" anchor="ctr"/>
           <a:lstStyle/>
           <a:p>
-            <a:pPr algn="l" indent="0" marL="0">
+            <a:pPr marL="0" indent="0" algn="l">
               <a:buNone/>
             </a:pPr>
             <a:r>
@@ -7443,6 +7525,13 @@
             <a:prstDash val="solid"/>
           </a:ln>
         </p:spPr>
+        <p:txBody>
+          <a:bodyPr/>
+          <a:lstStyle/>
+          <a:p>
+            <a:endParaRPr lang="sv-SE"/>
+          </a:p>
+        </p:txBody>
       </p:sp>
       <p:sp>
         <p:nvSpPr>
@@ -7468,6 +7557,13 @@
             <a:prstDash val="solid"/>
           </a:ln>
         </p:spPr>
+        <p:txBody>
+          <a:bodyPr/>
+          <a:lstStyle/>
+          <a:p>
+            <a:endParaRPr lang="sv-SE"/>
+          </a:p>
+        </p:txBody>
       </p:sp>
       <p:sp>
         <p:nvSpPr>
@@ -7490,7 +7586,7 @@
           <a:bodyPr wrap="square" lIns="0" tIns="0" rIns="0" bIns="0" rtlCol="0" anchor="ctr"/>
           <a:lstStyle/>
           <a:p>
-            <a:pPr algn="ctr" indent="0" marL="0">
+            <a:pPr marL="0" indent="0" algn="ctr">
               <a:buNone/>
             </a:pPr>
             <a:r>
@@ -7507,7 +7603,7 @@
             <a:endParaRPr lang="en-US" sz="1400" dirty="0"/>
           </a:p>
           <a:p>
-            <a:pPr algn="ctr" indent="0" marL="0">
+            <a:pPr marL="0" indent="0" algn="ctr">
               <a:buNone/>
             </a:pPr>
             <a:r>
@@ -7549,6 +7645,13 @@
             <a:prstDash val="solid"/>
           </a:ln>
         </p:spPr>
+        <p:txBody>
+          <a:bodyPr/>
+          <a:lstStyle/>
+          <a:p>
+            <a:endParaRPr lang="sv-SE"/>
+          </a:p>
+        </p:txBody>
       </p:sp>
       <p:sp>
         <p:nvSpPr>
@@ -7571,7 +7674,7 @@
           <a:bodyPr wrap="square" lIns="0" tIns="0" rIns="0" bIns="0" rtlCol="0" anchor="ctr"/>
           <a:lstStyle/>
           <a:p>
-            <a:pPr algn="ctr" indent="0" marL="0">
+            <a:pPr marL="0" indent="0" algn="ctr">
               <a:buNone/>
             </a:pPr>
             <a:r>
@@ -7588,7 +7691,7 @@
             <a:endParaRPr lang="en-US" sz="1400" dirty="0"/>
           </a:p>
           <a:p>
-            <a:pPr algn="ctr" indent="0" marL="0">
+            <a:pPr marL="0" indent="0" algn="ctr">
               <a:buNone/>
             </a:pPr>
             <a:r>
@@ -7630,6 +7733,13 @@
             <a:prstDash val="solid"/>
           </a:ln>
         </p:spPr>
+        <p:txBody>
+          <a:bodyPr/>
+          <a:lstStyle/>
+          <a:p>
+            <a:endParaRPr lang="sv-SE"/>
+          </a:p>
+        </p:txBody>
       </p:sp>
       <p:sp>
         <p:nvSpPr>
@@ -7652,7 +7762,7 @@
           <a:bodyPr wrap="square" lIns="0" tIns="0" rIns="0" bIns="0" rtlCol="0" anchor="ctr"/>
           <a:lstStyle/>
           <a:p>
-            <a:pPr algn="ctr" indent="0" marL="0">
+            <a:pPr marL="0" indent="0" algn="ctr">
               <a:buNone/>
             </a:pPr>
             <a:r>
@@ -7669,7 +7779,7 @@
             <a:endParaRPr lang="en-US" sz="1400" dirty="0"/>
           </a:p>
           <a:p>
-            <a:pPr algn="ctr" indent="0" marL="0">
+            <a:pPr marL="0" indent="0" algn="ctr">
               <a:buNone/>
             </a:pPr>
             <a:r>
@@ -7708,7 +7818,7 @@
           <a:bodyPr wrap="square" lIns="0" tIns="0" rIns="0" bIns="0" rtlCol="0" anchor="ctr"/>
           <a:lstStyle/>
           <a:p>
-            <a:pPr algn="ctr" indent="0" marL="0">
+            <a:pPr marL="0" indent="0" algn="ctr">
               <a:buNone/>
             </a:pPr>
             <a:r>
@@ -7742,6 +7852,7 @@
         <a:solidFill>
           <a:srgbClr val="F5F5F5"/>
         </a:solidFill>
+        <a:effectLst/>
       </p:bgPr>
     </p:bg>
     <p:spTree>
@@ -7782,6 +7893,13 @@
             <a:prstDash val="solid"/>
           </a:ln>
         </p:spPr>
+        <p:txBody>
+          <a:bodyPr/>
+          <a:lstStyle/>
+          <a:p>
+            <a:endParaRPr lang="sv-SE"/>
+          </a:p>
+        </p:txBody>
       </p:sp>
       <p:sp>
         <p:nvSpPr>
@@ -7804,7 +7922,7 @@
           <a:bodyPr wrap="square" lIns="0" tIns="0" rIns="0" bIns="0" rtlCol="0" anchor="ctr"/>
           <a:lstStyle/>
           <a:p>
-            <a:pPr algn="l" indent="0" marL="0">
+            <a:pPr marL="0" indent="0" algn="l">
               <a:buNone/>
             </a:pPr>
             <a:r>
@@ -7846,6 +7964,13 @@
             <a:prstDash val="solid"/>
           </a:ln>
         </p:spPr>
+        <p:txBody>
+          <a:bodyPr/>
+          <a:lstStyle/>
+          <a:p>
+            <a:endParaRPr lang="sv-SE"/>
+          </a:p>
+        </p:txBody>
       </p:sp>
       <p:graphicFrame>
         <p:nvGraphicFramePr>
@@ -7863,17 +7988,41 @@
         </p:nvGraphicFramePr>
         <p:xfrm>
           <a:off x="457200" y="1005840"/>
-          <a:ext cx="8229600" cy="3657600"/>
+          <a:ext cx="8229600" cy="3429000"/>
         </p:xfrm>
         <a:graphic>
           <a:graphicData uri="http://schemas.openxmlformats.org/drawingml/2006/table">
             <a:tbl>
               <a:tblPr/>
               <a:tblGrid>
-                <a:gridCol w="1280160"/>
-                <a:gridCol w="2743200"/>
-                <a:gridCol w="1371600"/>
-                <a:gridCol w="2834640"/>
+                <a:gridCol w="1280160">
+                  <a:extLst>
+                    <a:ext uri="{9D8B030D-6E8A-4147-A177-3AD203B41FA5}">
+                      <a16:colId xmlns:a16="http://schemas.microsoft.com/office/drawing/2014/main" val="20000"/>
+                    </a:ext>
+                  </a:extLst>
+                </a:gridCol>
+                <a:gridCol w="2743200">
+                  <a:extLst>
+                    <a:ext uri="{9D8B030D-6E8A-4147-A177-3AD203B41FA5}">
+                      <a16:colId xmlns:a16="http://schemas.microsoft.com/office/drawing/2014/main" val="20001"/>
+                    </a:ext>
+                  </a:extLst>
+                </a:gridCol>
+                <a:gridCol w="1371600">
+                  <a:extLst>
+                    <a:ext uri="{9D8B030D-6E8A-4147-A177-3AD203B41FA5}">
+                      <a16:colId xmlns:a16="http://schemas.microsoft.com/office/drawing/2014/main" val="20002"/>
+                    </a:ext>
+                  </a:extLst>
+                </a:gridCol>
+                <a:gridCol w="2834640">
+                  <a:extLst>
+                    <a:ext uri="{9D8B030D-6E8A-4147-A177-3AD203B41FA5}">
+                      <a16:colId xmlns:a16="http://schemas.microsoft.com/office/drawing/2014/main" val="20003"/>
+                    </a:ext>
+                  </a:extLst>
+                </a:gridCol>
               </a:tblGrid>
               <a:tr h="685800">
                 <a:tc>
@@ -7881,7 +8030,7 @@
                     <a:bodyPr/>
                     <a:lstStyle/>
                     <a:p>
-                      <a:pPr algn="ctr" indent="0" marL="0">
+                      <a:pPr marL="0" indent="0" algn="ctr">
                         <a:buNone/>
                       </a:pPr>
                       <a:r>
@@ -7902,7 +8051,7 @@
                       </a:endParaRPr>
                     </a:p>
                   </a:txBody>
-                  <a:tcPr marL="91440" marR="91440" marT="45720" marB="45720" anchor="ctr">
+                  <a:tcPr anchor="ctr">
                     <a:lnL w="6350" cap="flat" cmpd="sng" algn="ctr">
                       <a:solidFill>
                         <a:srgbClr val="D1D5DB"/>
@@ -7949,7 +8098,7 @@
                     <a:bodyPr/>
                     <a:lstStyle/>
                     <a:p>
-                      <a:pPr algn="ctr" indent="0" marL="0">
+                      <a:pPr marL="0" indent="0" algn="ctr">
                         <a:buNone/>
                       </a:pPr>
                       <a:r>
@@ -7970,7 +8119,7 @@
                       </a:endParaRPr>
                     </a:p>
                   </a:txBody>
-                  <a:tcPr marL="91440" marR="91440" marT="45720" marB="45720" anchor="ctr">
+                  <a:tcPr anchor="ctr">
                     <a:lnL w="6350" cap="flat" cmpd="sng" algn="ctr">
                       <a:solidFill>
                         <a:srgbClr val="D1D5DB"/>
@@ -8017,7 +8166,7 @@
                     <a:bodyPr/>
                     <a:lstStyle/>
                     <a:p>
-                      <a:pPr algn="ctr" indent="0" marL="0">
+                      <a:pPr marL="0" indent="0" algn="ctr">
                         <a:buNone/>
                       </a:pPr>
                       <a:r>
@@ -8038,7 +8187,7 @@
                       </a:endParaRPr>
                     </a:p>
                   </a:txBody>
-                  <a:tcPr marL="91440" marR="91440" marT="45720" marB="45720" anchor="ctr">
+                  <a:tcPr anchor="ctr">
                     <a:lnL w="6350" cap="flat" cmpd="sng" algn="ctr">
                       <a:solidFill>
                         <a:srgbClr val="D1D5DB"/>
@@ -8085,7 +8234,7 @@
                     <a:bodyPr/>
                     <a:lstStyle/>
                     <a:p>
-                      <a:pPr algn="ctr" indent="0" marL="0">
+                      <a:pPr marL="0" indent="0" algn="ctr">
                         <a:buNone/>
                       </a:pPr>
                       <a:r>
@@ -8106,7 +8255,7 @@
                       </a:endParaRPr>
                     </a:p>
                   </a:txBody>
-                  <a:tcPr marL="91440" marR="91440" marT="45720" marB="45720" anchor="ctr">
+                  <a:tcPr anchor="ctr">
                     <a:lnL w="6350" cap="flat" cmpd="sng" algn="ctr">
                       <a:solidFill>
                         <a:srgbClr val="D1D5DB"/>
@@ -8148,6 +8297,11 @@
                     </a:solidFill>
                   </a:tcPr>
                 </a:tc>
+                <a:extLst>
+                  <a:ext uri="{0D108BD9-81ED-4DB2-BD59-A6C34878D82A}">
+                    <a16:rowId xmlns:a16="http://schemas.microsoft.com/office/drawing/2014/main" val="10000"/>
+                  </a:ext>
+                </a:extLst>
               </a:tr>
               <a:tr h="685800">
                 <a:tc>
@@ -8155,7 +8309,7 @@
                     <a:bodyPr/>
                     <a:lstStyle/>
                     <a:p>
-                      <a:pPr algn="l" indent="0" marL="0">
+                      <a:pPr marL="0" indent="0" algn="l">
                         <a:buNone/>
                       </a:pPr>
                       <a:r>
@@ -8176,7 +8330,7 @@
                       </a:endParaRPr>
                     </a:p>
                   </a:txBody>
-                  <a:tcPr marL="91440" marR="91440" marT="45720" marB="45720" anchor="ctr">
+                  <a:tcPr anchor="ctr">
                     <a:lnL w="6350" cap="flat" cmpd="sng" algn="ctr">
                       <a:solidFill>
                         <a:srgbClr val="D1D5DB"/>
@@ -8223,7 +8377,7 @@
                     <a:bodyPr/>
                     <a:lstStyle/>
                     <a:p>
-                      <a:pPr algn="l" indent="0" marL="0">
+                      <a:pPr marL="0" indent="0" algn="l">
                         <a:buNone/>
                       </a:pPr>
                       <a:r>
@@ -8244,7 +8398,7 @@
                       </a:endParaRPr>
                     </a:p>
                   </a:txBody>
-                  <a:tcPr marL="91440" marR="91440" marT="45720" marB="45720" anchor="ctr">
+                  <a:tcPr anchor="ctr">
                     <a:lnL w="6350" cap="flat" cmpd="sng" algn="ctr">
                       <a:solidFill>
                         <a:srgbClr val="D1D5DB"/>
@@ -8291,7 +8445,7 @@
                     <a:bodyPr/>
                     <a:lstStyle/>
                     <a:p>
-                      <a:pPr algn="l" indent="0" marL="0">
+                      <a:pPr marL="0" indent="0" algn="l">
                         <a:buNone/>
                       </a:pPr>
                       <a:r>
@@ -8312,7 +8466,7 @@
                       </a:endParaRPr>
                     </a:p>
                   </a:txBody>
-                  <a:tcPr marL="91440" marR="91440" marT="45720" marB="45720" anchor="ctr">
+                  <a:tcPr anchor="ctr">
                     <a:lnL w="6350" cap="flat" cmpd="sng" algn="ctr">
                       <a:solidFill>
                         <a:srgbClr val="D1D5DB"/>
@@ -8359,7 +8513,7 @@
                     <a:bodyPr/>
                     <a:lstStyle/>
                     <a:p>
-                      <a:pPr algn="l" indent="0" marL="0">
+                      <a:pPr marL="0" indent="0" algn="l">
                         <a:buNone/>
                       </a:pPr>
                       <a:r>
@@ -8380,7 +8534,7 @@
                       </a:endParaRPr>
                     </a:p>
                   </a:txBody>
-                  <a:tcPr marL="91440" marR="91440" marT="45720" marB="45720" anchor="ctr">
+                  <a:tcPr anchor="ctr">
                     <a:lnL w="6350" cap="flat" cmpd="sng" algn="ctr">
                       <a:solidFill>
                         <a:srgbClr val="D1D5DB"/>
@@ -8422,6 +8576,11 @@
                     </a:solidFill>
                   </a:tcPr>
                 </a:tc>
+                <a:extLst>
+                  <a:ext uri="{0D108BD9-81ED-4DB2-BD59-A6C34878D82A}">
+                    <a16:rowId xmlns:a16="http://schemas.microsoft.com/office/drawing/2014/main" val="10001"/>
+                  </a:ext>
+                </a:extLst>
               </a:tr>
               <a:tr h="685800">
                 <a:tc>
@@ -8429,7 +8588,7 @@
                     <a:bodyPr/>
                     <a:lstStyle/>
                     <a:p>
-                      <a:pPr algn="l" indent="0" marL="0">
+                      <a:pPr marL="0" indent="0" algn="l">
                         <a:buNone/>
                       </a:pPr>
                       <a:r>
@@ -8450,7 +8609,7 @@
                       </a:endParaRPr>
                     </a:p>
                   </a:txBody>
-                  <a:tcPr marL="91440" marR="91440" marT="45720" marB="45720" anchor="ctr">
+                  <a:tcPr anchor="ctr">
                     <a:lnL w="6350" cap="flat" cmpd="sng" algn="ctr">
                       <a:solidFill>
                         <a:srgbClr val="D1D5DB"/>
@@ -8497,7 +8656,7 @@
                     <a:bodyPr/>
                     <a:lstStyle/>
                     <a:p>
-                      <a:pPr algn="l" indent="0" marL="0">
+                      <a:pPr marL="0" indent="0" algn="l">
                         <a:buNone/>
                       </a:pPr>
                       <a:r>
@@ -8518,7 +8677,7 @@
                       </a:endParaRPr>
                     </a:p>
                   </a:txBody>
-                  <a:tcPr marL="91440" marR="91440" marT="45720" marB="45720" anchor="ctr">
+                  <a:tcPr anchor="ctr">
                     <a:lnL w="6350" cap="flat" cmpd="sng" algn="ctr">
                       <a:solidFill>
                         <a:srgbClr val="D1D5DB"/>
@@ -8565,7 +8724,7 @@
                     <a:bodyPr/>
                     <a:lstStyle/>
                     <a:p>
-                      <a:pPr algn="l" indent="0" marL="0">
+                      <a:pPr marL="0" indent="0" algn="l">
                         <a:buNone/>
                       </a:pPr>
                       <a:r>
@@ -8586,7 +8745,7 @@
                       </a:endParaRPr>
                     </a:p>
                   </a:txBody>
-                  <a:tcPr marL="91440" marR="91440" marT="45720" marB="45720" anchor="ctr">
+                  <a:tcPr anchor="ctr">
                     <a:lnL w="6350" cap="flat" cmpd="sng" algn="ctr">
                       <a:solidFill>
                         <a:srgbClr val="D1D5DB"/>
@@ -8633,7 +8792,7 @@
                     <a:bodyPr/>
                     <a:lstStyle/>
                     <a:p>
-                      <a:pPr algn="l" indent="0" marL="0">
+                      <a:pPr marL="0" indent="0" algn="l">
                         <a:buNone/>
                       </a:pPr>
                       <a:r>
@@ -8654,7 +8813,7 @@
                       </a:endParaRPr>
                     </a:p>
                   </a:txBody>
-                  <a:tcPr marL="91440" marR="91440" marT="45720" marB="45720" anchor="ctr">
+                  <a:tcPr anchor="ctr">
                     <a:lnL w="6350" cap="flat" cmpd="sng" algn="ctr">
                       <a:solidFill>
                         <a:srgbClr val="D1D5DB"/>
@@ -8696,6 +8855,11 @@
                     </a:solidFill>
                   </a:tcPr>
                 </a:tc>
+                <a:extLst>
+                  <a:ext uri="{0D108BD9-81ED-4DB2-BD59-A6C34878D82A}">
+                    <a16:rowId xmlns:a16="http://schemas.microsoft.com/office/drawing/2014/main" val="10002"/>
+                  </a:ext>
+                </a:extLst>
               </a:tr>
               <a:tr h="685800">
                 <a:tc>
@@ -8703,7 +8867,7 @@
                     <a:bodyPr/>
                     <a:lstStyle/>
                     <a:p>
-                      <a:pPr algn="l" indent="0" marL="0">
+                      <a:pPr marL="0" indent="0" algn="l">
                         <a:buNone/>
                       </a:pPr>
                       <a:r>
@@ -8724,7 +8888,7 @@
                       </a:endParaRPr>
                     </a:p>
                   </a:txBody>
-                  <a:tcPr marL="91440" marR="91440" marT="45720" marB="45720" anchor="ctr">
+                  <a:tcPr anchor="ctr">
                     <a:lnL w="6350" cap="flat" cmpd="sng" algn="ctr">
                       <a:solidFill>
                         <a:srgbClr val="D1D5DB"/>
@@ -8771,7 +8935,7 @@
                     <a:bodyPr/>
                     <a:lstStyle/>
                     <a:p>
-                      <a:pPr algn="l" indent="0" marL="0">
+                      <a:pPr marL="0" indent="0" algn="l">
                         <a:buNone/>
                       </a:pPr>
                       <a:r>
@@ -8792,7 +8956,7 @@
                       </a:endParaRPr>
                     </a:p>
                   </a:txBody>
-                  <a:tcPr marL="91440" marR="91440" marT="45720" marB="45720" anchor="ctr">
+                  <a:tcPr anchor="ctr">
                     <a:lnL w="6350" cap="flat" cmpd="sng" algn="ctr">
                       <a:solidFill>
                         <a:srgbClr val="D1D5DB"/>
@@ -8839,7 +9003,7 @@
                     <a:bodyPr/>
                     <a:lstStyle/>
                     <a:p>
-                      <a:pPr algn="l" indent="0" marL="0">
+                      <a:pPr marL="0" indent="0" algn="l">
                         <a:buNone/>
                       </a:pPr>
                       <a:r>
@@ -8860,7 +9024,7 @@
                       </a:endParaRPr>
                     </a:p>
                   </a:txBody>
-                  <a:tcPr marL="91440" marR="91440" marT="45720" marB="45720" anchor="ctr">
+                  <a:tcPr anchor="ctr">
                     <a:lnL w="6350" cap="flat" cmpd="sng" algn="ctr">
                       <a:solidFill>
                         <a:srgbClr val="D1D5DB"/>
@@ -8907,7 +9071,7 @@
                     <a:bodyPr/>
                     <a:lstStyle/>
                     <a:p>
-                      <a:pPr algn="l" indent="0" marL="0">
+                      <a:pPr marL="0" indent="0" algn="l">
                         <a:buNone/>
                       </a:pPr>
                       <a:r>
@@ -8928,7 +9092,7 @@
                       </a:endParaRPr>
                     </a:p>
                   </a:txBody>
-                  <a:tcPr marL="91440" marR="91440" marT="45720" marB="45720" anchor="ctr">
+                  <a:tcPr anchor="ctr">
                     <a:lnL w="6350" cap="flat" cmpd="sng" algn="ctr">
                       <a:solidFill>
                         <a:srgbClr val="D1D5DB"/>
@@ -8970,6 +9134,11 @@
                     </a:solidFill>
                   </a:tcPr>
                 </a:tc>
+                <a:extLst>
+                  <a:ext uri="{0D108BD9-81ED-4DB2-BD59-A6C34878D82A}">
+                    <a16:rowId xmlns:a16="http://schemas.microsoft.com/office/drawing/2014/main" val="10003"/>
+                  </a:ext>
+                </a:extLst>
               </a:tr>
               <a:tr h="685800">
                 <a:tc>
@@ -8977,7 +9146,7 @@
                     <a:bodyPr/>
                     <a:lstStyle/>
                     <a:p>
-                      <a:pPr algn="l" indent="0" marL="0">
+                      <a:pPr marL="0" indent="0" algn="l">
                         <a:buNone/>
                       </a:pPr>
                       <a:r>
@@ -8998,7 +9167,7 @@
                       </a:endParaRPr>
                     </a:p>
                   </a:txBody>
-                  <a:tcPr marL="91440" marR="91440" marT="45720" marB="45720" anchor="ctr">
+                  <a:tcPr anchor="ctr">
                     <a:lnL w="6350" cap="flat" cmpd="sng" algn="ctr">
                       <a:solidFill>
                         <a:srgbClr val="D1D5DB"/>
@@ -9045,7 +9214,7 @@
                     <a:bodyPr/>
                     <a:lstStyle/>
                     <a:p>
-                      <a:pPr algn="l" indent="0" marL="0">
+                      <a:pPr marL="0" indent="0" algn="l">
                         <a:buNone/>
                       </a:pPr>
                       <a:r>
@@ -9066,7 +9235,7 @@
                       </a:endParaRPr>
                     </a:p>
                   </a:txBody>
-                  <a:tcPr marL="91440" marR="91440" marT="45720" marB="45720" anchor="ctr">
+                  <a:tcPr anchor="ctr">
                     <a:lnL w="6350" cap="flat" cmpd="sng" algn="ctr">
                       <a:solidFill>
                         <a:srgbClr val="D1D5DB"/>
@@ -9113,7 +9282,7 @@
                     <a:bodyPr/>
                     <a:lstStyle/>
                     <a:p>
-                      <a:pPr algn="l" indent="0" marL="0">
+                      <a:pPr marL="0" indent="0" algn="l">
                         <a:buNone/>
                       </a:pPr>
                       <a:r>
@@ -9134,7 +9303,7 @@
                       </a:endParaRPr>
                     </a:p>
                   </a:txBody>
-                  <a:tcPr marL="91440" marR="91440" marT="45720" marB="45720" anchor="ctr">
+                  <a:tcPr anchor="ctr">
                     <a:lnL w="6350" cap="flat" cmpd="sng" algn="ctr">
                       <a:solidFill>
                         <a:srgbClr val="D1D5DB"/>
@@ -9181,7 +9350,7 @@
                     <a:bodyPr/>
                     <a:lstStyle/>
                     <a:p>
-                      <a:pPr algn="l" indent="0" marL="0">
+                      <a:pPr marL="0" indent="0" algn="l">
                         <a:buNone/>
                       </a:pPr>
                       <a:r>
@@ -9202,7 +9371,7 @@
                       </a:endParaRPr>
                     </a:p>
                   </a:txBody>
-                  <a:tcPr marL="91440" marR="91440" marT="45720" marB="45720" anchor="ctr">
+                  <a:tcPr anchor="ctr">
                     <a:lnL w="6350" cap="flat" cmpd="sng" algn="ctr">
                       <a:solidFill>
                         <a:srgbClr val="D1D5DB"/>
@@ -9244,6 +9413,11 @@
                     </a:solidFill>
                   </a:tcPr>
                 </a:tc>
+                <a:extLst>
+                  <a:ext uri="{0D108BD9-81ED-4DB2-BD59-A6C34878D82A}">
+                    <a16:rowId xmlns:a16="http://schemas.microsoft.com/office/drawing/2014/main" val="10004"/>
+                  </a:ext>
+                </a:extLst>
               </a:tr>
             </a:tbl>
           </a:graphicData>
@@ -9265,6 +9439,7 @@
         <a:solidFill>
           <a:srgbClr val="F5F5F5"/>
         </a:solidFill>
+        <a:effectLst/>
       </p:bgPr>
     </p:bg>
     <p:spTree>
@@ -9305,6 +9480,13 @@
             <a:prstDash val="solid"/>
           </a:ln>
         </p:spPr>
+        <p:txBody>
+          <a:bodyPr/>
+          <a:lstStyle/>
+          <a:p>
+            <a:endParaRPr lang="sv-SE"/>
+          </a:p>
+        </p:txBody>
       </p:sp>
       <p:sp>
         <p:nvSpPr>
@@ -9327,7 +9509,7 @@
           <a:bodyPr wrap="square" lIns="0" tIns="0" rIns="0" bIns="0" rtlCol="0" anchor="ctr"/>
           <a:lstStyle/>
           <a:p>
-            <a:pPr algn="l" indent="0" marL="0">
+            <a:pPr marL="0" indent="0" algn="l">
               <a:buNone/>
             </a:pPr>
             <a:r>
@@ -9369,6 +9551,13 @@
             <a:prstDash val="solid"/>
           </a:ln>
         </p:spPr>
+        <p:txBody>
+          <a:bodyPr/>
+          <a:lstStyle/>
+          <a:p>
+            <a:endParaRPr lang="sv-SE"/>
+          </a:p>
+        </p:txBody>
       </p:sp>
       <p:sp>
         <p:nvSpPr>
@@ -9394,13 +9583,20 @@
             <a:prstDash val="solid"/>
           </a:ln>
           <a:effectLst>
-            <a:outerShdw sx="100000" sy="100000" kx="0" ky="0" algn="bl" rotWithShape="0" blurRad="101600" dist="38100" dir="8100000">
+            <a:outerShdw blurRad="101600" dist="38100" dir="8100000" algn="bl" rotWithShape="0">
               <a:srgbClr val="000000">
                 <a:alpha val="12000"/>
               </a:srgbClr>
             </a:outerShdw>
           </a:effectLst>
         </p:spPr>
+        <p:txBody>
+          <a:bodyPr/>
+          <a:lstStyle/>
+          <a:p>
+            <a:endParaRPr lang="sv-SE"/>
+          </a:p>
+        </p:txBody>
       </p:sp>
       <p:sp>
         <p:nvSpPr>
@@ -9423,7 +9619,7 @@
           <a:bodyPr wrap="square" lIns="0" tIns="0" rIns="0" bIns="0" rtlCol="0" anchor="ctr"/>
           <a:lstStyle/>
           <a:p>
-            <a:pPr algn="ctr" indent="0" marL="0">
+            <a:pPr marL="0" indent="0" algn="ctr">
               <a:buNone/>
             </a:pPr>
             <a:r>
@@ -9462,7 +9658,7 @@
           <a:bodyPr wrap="square" lIns="0" tIns="0" rIns="0" bIns="0" rtlCol="0" anchor="t"/>
           <a:lstStyle/>
           <a:p>
-            <a:pPr algn="ctr" indent="0" marL="0">
+            <a:pPr marL="0" indent="0" algn="ctr">
               <a:buNone/>
             </a:pPr>
             <a:r>
@@ -9501,7 +9697,7 @@
           <a:bodyPr wrap="square" lIns="0" tIns="0" rIns="0" bIns="0" rtlCol="0" anchor="ctr"/>
           <a:lstStyle/>
           <a:p>
-            <a:pPr algn="ctr" indent="0" marL="0">
+            <a:pPr marL="0" indent="0" algn="ctr">
               <a:buNone/>
             </a:pPr>
             <a:r>
@@ -9540,13 +9736,20 @@
             <a:prstDash val="solid"/>
           </a:ln>
           <a:effectLst>
-            <a:outerShdw sx="100000" sy="100000" kx="0" ky="0" algn="bl" rotWithShape="0" blurRad="101600" dist="38100" dir="8100000">
+            <a:outerShdw blurRad="101600" dist="38100" dir="8100000" algn="bl" rotWithShape="0">
               <a:srgbClr val="000000">
                 <a:alpha val="12000"/>
               </a:srgbClr>
             </a:outerShdw>
           </a:effectLst>
         </p:spPr>
+        <p:txBody>
+          <a:bodyPr/>
+          <a:lstStyle/>
+          <a:p>
+            <a:endParaRPr lang="sv-SE"/>
+          </a:p>
+        </p:txBody>
       </p:sp>
       <p:sp>
         <p:nvSpPr>
@@ -9569,7 +9772,7 @@
           <a:bodyPr wrap="square" lIns="0" tIns="0" rIns="0" bIns="0" rtlCol="0" anchor="ctr"/>
           <a:lstStyle/>
           <a:p>
-            <a:pPr algn="ctr" indent="0" marL="0">
+            <a:pPr marL="0" indent="0" algn="ctr">
               <a:buNone/>
             </a:pPr>
             <a:r>
@@ -9608,7 +9811,7 @@
           <a:bodyPr wrap="square" lIns="0" tIns="0" rIns="0" bIns="0" rtlCol="0" anchor="t"/>
           <a:lstStyle/>
           <a:p>
-            <a:pPr algn="ctr" indent="0" marL="0">
+            <a:pPr marL="0" indent="0" algn="ctr">
               <a:buNone/>
             </a:pPr>
             <a:r>
@@ -9647,7 +9850,7 @@
           <a:bodyPr wrap="square" lIns="0" tIns="0" rIns="0" bIns="0" rtlCol="0" anchor="ctr"/>
           <a:lstStyle/>
           <a:p>
-            <a:pPr algn="ctr" indent="0" marL="0">
+            <a:pPr marL="0" indent="0" algn="ctr">
               <a:buNone/>
             </a:pPr>
             <a:r>
@@ -9686,13 +9889,20 @@
             <a:prstDash val="solid"/>
           </a:ln>
           <a:effectLst>
-            <a:outerShdw sx="100000" sy="100000" kx="0" ky="0" algn="bl" rotWithShape="0" blurRad="101600" dist="38100" dir="8100000">
+            <a:outerShdw blurRad="101600" dist="38100" dir="8100000" algn="bl" rotWithShape="0">
               <a:srgbClr val="000000">
                 <a:alpha val="12000"/>
               </a:srgbClr>
             </a:outerShdw>
           </a:effectLst>
         </p:spPr>
+        <p:txBody>
+          <a:bodyPr/>
+          <a:lstStyle/>
+          <a:p>
+            <a:endParaRPr lang="sv-SE"/>
+          </a:p>
+        </p:txBody>
       </p:sp>
       <p:sp>
         <p:nvSpPr>
@@ -9715,7 +9925,7 @@
           <a:bodyPr wrap="square" lIns="0" tIns="0" rIns="0" bIns="0" rtlCol="0" anchor="ctr"/>
           <a:lstStyle/>
           <a:p>
-            <a:pPr algn="ctr" indent="0" marL="0">
+            <a:pPr marL="0" indent="0" algn="ctr">
               <a:buNone/>
             </a:pPr>
             <a:r>
@@ -9754,7 +9964,7 @@
           <a:bodyPr wrap="square" lIns="0" tIns="0" rIns="0" bIns="0" rtlCol="0" anchor="t"/>
           <a:lstStyle/>
           <a:p>
-            <a:pPr algn="ctr" indent="0" marL="0">
+            <a:pPr marL="0" indent="0" algn="ctr">
               <a:buNone/>
             </a:pPr>
             <a:r>
@@ -9793,7 +10003,7 @@
           <a:bodyPr wrap="square" lIns="0" tIns="0" rIns="0" bIns="0" rtlCol="0" anchor="ctr"/>
           <a:lstStyle/>
           <a:p>
-            <a:pPr algn="ctr" indent="0" marL="0">
+            <a:pPr marL="0" indent="0" algn="ctr">
               <a:buNone/>
             </a:pPr>
             <a:r>
@@ -9912,6 +10122,7 @@
         <a:solidFill>
           <a:srgbClr val="F5F5F5"/>
         </a:solidFill>
+        <a:effectLst/>
       </p:bgPr>
     </p:bg>
     <p:spTree>
@@ -9952,6 +10163,13 @@
             <a:prstDash val="solid"/>
           </a:ln>
         </p:spPr>
+        <p:txBody>
+          <a:bodyPr/>
+          <a:lstStyle/>
+          <a:p>
+            <a:endParaRPr lang="sv-SE"/>
+          </a:p>
+        </p:txBody>
       </p:sp>
       <p:sp>
         <p:nvSpPr>
@@ -9974,7 +10192,7 @@
           <a:bodyPr wrap="square" lIns="0" tIns="0" rIns="0" bIns="0" rtlCol="0" anchor="ctr"/>
           <a:lstStyle/>
           <a:p>
-            <a:pPr algn="l" indent="0" marL="0">
+            <a:pPr marL="0" indent="0" algn="l">
               <a:buNone/>
             </a:pPr>
             <a:r>
@@ -10016,6 +10234,13 @@
             <a:prstDash val="solid"/>
           </a:ln>
         </p:spPr>
+        <p:txBody>
+          <a:bodyPr/>
+          <a:lstStyle/>
+          <a:p>
+            <a:endParaRPr lang="sv-SE"/>
+          </a:p>
+        </p:txBody>
       </p:sp>
       <p:sp>
         <p:nvSpPr>
@@ -10041,13 +10266,20 @@
             <a:prstDash val="solid"/>
           </a:ln>
           <a:effectLst>
-            <a:outerShdw sx="100000" sy="100000" kx="0" ky="0" algn="bl" rotWithShape="0" blurRad="101600" dist="38100" dir="8100000">
+            <a:outerShdw blurRad="101600" dist="38100" dir="8100000" algn="bl" rotWithShape="0">
               <a:srgbClr val="000000">
                 <a:alpha val="12000"/>
               </a:srgbClr>
             </a:outerShdw>
           </a:effectLst>
         </p:spPr>
+        <p:txBody>
+          <a:bodyPr/>
+          <a:lstStyle/>
+          <a:p>
+            <a:endParaRPr lang="sv-SE"/>
+          </a:p>
+        </p:txBody>
       </p:sp>
       <p:sp>
         <p:nvSpPr>
@@ -10070,7 +10302,7 @@
           <a:bodyPr wrap="square" lIns="0" tIns="0" rIns="0" bIns="0" rtlCol="0" anchor="t"/>
           <a:lstStyle/>
           <a:p>
-            <a:pPr indent="0" marL="0">
+            <a:pPr marL="0" indent="0">
               <a:buNone/>
             </a:pPr>
             <a:r>
@@ -10087,7 +10319,7 @@
             <a:endParaRPr lang="en-US" sz="1200" dirty="0"/>
           </a:p>
           <a:p>
-            <a:pPr indent="0" marL="0">
+            <a:pPr marL="0" indent="0">
               <a:buNone/>
             </a:pPr>
             <a:r>
@@ -10104,7 +10336,7 @@
             <a:endParaRPr lang="en-US" sz="1200" dirty="0"/>
           </a:p>
           <a:p>
-            <a:pPr indent="0" marL="0">
+            <a:pPr marL="0" indent="0">
               <a:buNone/>
             </a:pPr>
             <a:r>
@@ -10121,7 +10353,7 @@
             <a:endParaRPr lang="en-US" sz="1200" dirty="0"/>
           </a:p>
           <a:p>
-            <a:pPr indent="0" marL="0">
+            <a:pPr marL="0" indent="0">
               <a:buNone/>
             </a:pPr>
             <a:r>
@@ -10138,7 +10370,7 @@
             <a:endParaRPr lang="en-US" sz="1200" dirty="0"/>
           </a:p>
           <a:p>
-            <a:pPr indent="0" marL="0">
+            <a:pPr marL="0" indent="0">
               <a:buNone/>
             </a:pPr>
             <a:r>
@@ -10155,13 +10387,13 @@
             <a:endParaRPr lang="en-US" sz="1200" dirty="0"/>
           </a:p>
           <a:p>
-            <a:pPr indent="0" marL="0">
+            <a:pPr marL="0" indent="0">
               <a:buNone/>
             </a:pPr>
             <a:endParaRPr lang="en-US" sz="1200" dirty="0"/>
           </a:p>
           <a:p>
-            <a:pPr indent="0" marL="0">
+            <a:pPr marL="0" indent="0">
               <a:buNone/>
             </a:pPr>
             <a:r>
@@ -10178,7 +10410,7 @@
             <a:endParaRPr lang="en-US" sz="1200" dirty="0"/>
           </a:p>
           <a:p>
-            <a:pPr indent="0" marL="0">
+            <a:pPr marL="0" indent="0">
               <a:buNone/>
             </a:pPr>
             <a:r>
@@ -10195,13 +10427,13 @@
             <a:endParaRPr lang="en-US" sz="1200" dirty="0"/>
           </a:p>
           <a:p>
-            <a:pPr indent="0" marL="0">
+            <a:pPr marL="0" indent="0">
               <a:buNone/>
             </a:pPr>
             <a:endParaRPr lang="en-US" sz="1200" dirty="0"/>
           </a:p>
           <a:p>
-            <a:pPr indent="0" marL="0">
+            <a:pPr marL="0" indent="0">
               <a:buNone/>
             </a:pPr>
             <a:r>
@@ -10218,7 +10450,7 @@
             <a:endParaRPr lang="en-US" sz="1200" dirty="0"/>
           </a:p>
           <a:p>
-            <a:pPr indent="0" marL="0">
+            <a:pPr marL="0" indent="0">
               <a:buNone/>
             </a:pPr>
             <a:r>
@@ -10235,7 +10467,7 @@
             <a:endParaRPr lang="en-US" sz="1200" dirty="0"/>
           </a:p>
           <a:p>
-            <a:pPr indent="0" marL="0">
+            <a:pPr marL="0" indent="0">
               <a:buNone/>
             </a:pPr>
             <a:r>
@@ -10252,13 +10484,13 @@
             <a:endParaRPr lang="en-US" sz="1200" dirty="0"/>
           </a:p>
           <a:p>
-            <a:pPr indent="0" marL="0">
+            <a:pPr marL="0" indent="0">
               <a:buNone/>
             </a:pPr>
             <a:endParaRPr lang="en-US" sz="1200" dirty="0"/>
           </a:p>
           <a:p>
-            <a:pPr indent="0" marL="0">
+            <a:pPr marL="0" indent="0">
               <a:buNone/>
             </a:pPr>
             <a:r>
@@ -10275,7 +10507,7 @@
             <a:endParaRPr lang="en-US" sz="1200" dirty="0"/>
           </a:p>
           <a:p>
-            <a:pPr indent="0" marL="0">
+            <a:pPr marL="0" indent="0">
               <a:buNone/>
             </a:pPr>
             <a:r>
@@ -10292,7 +10524,7 @@
             <a:endParaRPr lang="en-US" sz="1200" dirty="0"/>
           </a:p>
           <a:p>
-            <a:pPr indent="0" marL="0">
+            <a:pPr marL="0" indent="0">
               <a:buNone/>
             </a:pPr>
             <a:r>
@@ -10309,7 +10541,7 @@
             <a:endParaRPr lang="en-US" sz="1200" dirty="0"/>
           </a:p>
           <a:p>
-            <a:pPr indent="0" marL="0">
+            <a:pPr marL="0" indent="0">
               <a:buNone/>
             </a:pPr>
             <a:r>
@@ -10326,7 +10558,7 @@
             <a:endParaRPr lang="en-US" sz="1200" dirty="0"/>
           </a:p>
           <a:p>
-            <a:pPr indent="0" marL="0">
+            <a:pPr marL="0" indent="0">
               <a:buNone/>
             </a:pPr>
             <a:r>
@@ -10343,7 +10575,7 @@
             <a:endParaRPr lang="en-US" sz="1200" dirty="0"/>
           </a:p>
           <a:p>
-            <a:pPr indent="0" marL="0">
+            <a:pPr marL="0" indent="0">
               <a:buNone/>
             </a:pPr>
             <a:r>
@@ -10360,7 +10592,7 @@
             <a:endParaRPr lang="en-US" sz="1200" dirty="0"/>
           </a:p>
           <a:p>
-            <a:pPr indent="0" marL="0">
+            <a:pPr marL="0" indent="0">
               <a:buNone/>
             </a:pPr>
             <a:r>
@@ -10394,6 +10626,7 @@
         <a:solidFill>
           <a:srgbClr val="F5F5F5"/>
         </a:solidFill>
+        <a:effectLst/>
       </p:bgPr>
     </p:bg>
     <p:spTree>
@@ -10434,6 +10667,13 @@
             <a:prstDash val="solid"/>
           </a:ln>
         </p:spPr>
+        <p:txBody>
+          <a:bodyPr/>
+          <a:lstStyle/>
+          <a:p>
+            <a:endParaRPr lang="sv-SE"/>
+          </a:p>
+        </p:txBody>
       </p:sp>
       <p:sp>
         <p:nvSpPr>
@@ -10456,7 +10696,7 @@
           <a:bodyPr wrap="square" lIns="0" tIns="0" rIns="0" bIns="0" rtlCol="0" anchor="ctr"/>
           <a:lstStyle/>
           <a:p>
-            <a:pPr algn="l" indent="0" marL="0">
+            <a:pPr marL="0" indent="0" algn="l">
               <a:buNone/>
             </a:pPr>
             <a:r>
@@ -10498,6 +10738,13 @@
             <a:prstDash val="solid"/>
           </a:ln>
         </p:spPr>
+        <p:txBody>
+          <a:bodyPr/>
+          <a:lstStyle/>
+          <a:p>
+            <a:endParaRPr lang="sv-SE"/>
+          </a:p>
+        </p:txBody>
       </p:sp>
       <p:sp>
         <p:nvSpPr>
@@ -10523,13 +10770,20 @@
             <a:prstDash val="solid"/>
           </a:ln>
           <a:effectLst>
-            <a:outerShdw sx="100000" sy="100000" kx="0" ky="0" algn="bl" rotWithShape="0" blurRad="101600" dist="38100" dir="8100000">
+            <a:outerShdw blurRad="101600" dist="38100" dir="8100000" algn="bl" rotWithShape="0">
               <a:srgbClr val="000000">
                 <a:alpha val="12000"/>
               </a:srgbClr>
             </a:outerShdw>
           </a:effectLst>
         </p:spPr>
+        <p:txBody>
+          <a:bodyPr/>
+          <a:lstStyle/>
+          <a:p>
+            <a:endParaRPr lang="sv-SE"/>
+          </a:p>
+        </p:txBody>
       </p:sp>
       <p:sp>
         <p:nvSpPr>
@@ -10552,7 +10806,7 @@
           <a:bodyPr wrap="square" lIns="0" tIns="0" rIns="0" bIns="0" rtlCol="0" anchor="t"/>
           <a:lstStyle/>
           <a:p>
-            <a:pPr indent="0" marL="0">
+            <a:pPr marL="0" indent="0">
               <a:buNone/>
             </a:pPr>
             <a:r>
@@ -10569,7 +10823,7 @@
             <a:endParaRPr lang="en-US" sz="1300" dirty="0"/>
           </a:p>
           <a:p>
-            <a:pPr indent="0" marL="0">
+            <a:pPr marL="0" indent="0">
               <a:buNone/>
             </a:pPr>
             <a:r>
@@ -10586,7 +10840,7 @@
             <a:endParaRPr lang="en-US" sz="1300" dirty="0"/>
           </a:p>
           <a:p>
-            <a:pPr indent="0" marL="0">
+            <a:pPr marL="0" indent="0">
               <a:buNone/>
             </a:pPr>
             <a:r>
@@ -10603,7 +10857,7 @@
             <a:endParaRPr lang="en-US" sz="1300" dirty="0"/>
           </a:p>
           <a:p>
-            <a:pPr indent="0" marL="0">
+            <a:pPr marL="0" indent="0">
               <a:buNone/>
             </a:pPr>
             <a:r>
@@ -10620,7 +10874,7 @@
             <a:endParaRPr lang="en-US" sz="1300" dirty="0"/>
           </a:p>
           <a:p>
-            <a:pPr indent="0" marL="0">
+            <a:pPr marL="0" indent="0">
               <a:buNone/>
             </a:pPr>
             <a:r>
@@ -10637,7 +10891,7 @@
             <a:endParaRPr lang="en-US" sz="1300" dirty="0"/>
           </a:p>
           <a:p>
-            <a:pPr indent="0" marL="0">
+            <a:pPr marL="0" indent="0">
               <a:buNone/>
             </a:pPr>
             <a:r>
@@ -10654,7 +10908,7 @@
             <a:endParaRPr lang="en-US" sz="1300" dirty="0"/>
           </a:p>
           <a:p>
-            <a:pPr indent="0" marL="0">
+            <a:pPr marL="0" indent="0">
               <a:buNone/>
             </a:pPr>
             <a:r>
@@ -10671,7 +10925,7 @@
             <a:endParaRPr lang="en-US" sz="1300" dirty="0"/>
           </a:p>
           <a:p>
-            <a:pPr indent="0" marL="0">
+            <a:pPr marL="0" indent="0">
               <a:buNone/>
             </a:pPr>
             <a:r>
@@ -10688,7 +10942,7 @@
             <a:endParaRPr lang="en-US" sz="1300" dirty="0"/>
           </a:p>
           <a:p>
-            <a:pPr indent="0" marL="0">
+            <a:pPr marL="0" indent="0">
               <a:buNone/>
             </a:pPr>
             <a:r>
@@ -10705,7 +10959,7 @@
             <a:endParaRPr lang="en-US" sz="1300" dirty="0"/>
           </a:p>
           <a:p>
-            <a:pPr indent="0" marL="0">
+            <a:pPr marL="0" indent="0">
               <a:buNone/>
             </a:pPr>
             <a:r>
@@ -10722,7 +10976,7 @@
             <a:endParaRPr lang="en-US" sz="1300" dirty="0"/>
           </a:p>
           <a:p>
-            <a:pPr indent="0" marL="0">
+            <a:pPr marL="0" indent="0">
               <a:buNone/>
             </a:pPr>
             <a:r>
@@ -10739,7 +10993,7 @@
             <a:endParaRPr lang="en-US" sz="1300" dirty="0"/>
           </a:p>
           <a:p>
-            <a:pPr indent="0" marL="0">
+            <a:pPr marL="0" indent="0">
               <a:buNone/>
             </a:pPr>
             <a:r>
@@ -10858,6 +11112,7 @@
         <a:solidFill>
           <a:srgbClr val="F5F5F5"/>
         </a:solidFill>
+        <a:effectLst/>
       </p:bgPr>
     </p:bg>
     <p:spTree>
@@ -10898,6 +11153,13 @@
             <a:prstDash val="solid"/>
           </a:ln>
         </p:spPr>
+        <p:txBody>
+          <a:bodyPr/>
+          <a:lstStyle/>
+          <a:p>
+            <a:endParaRPr lang="sv-SE"/>
+          </a:p>
+        </p:txBody>
       </p:sp>
       <p:sp>
         <p:nvSpPr>
@@ -10920,7 +11182,7 @@
           <a:bodyPr wrap="square" lIns="0" tIns="0" rIns="0" bIns="0" rtlCol="0" anchor="ctr"/>
           <a:lstStyle/>
           <a:p>
-            <a:pPr algn="l" indent="0" marL="0">
+            <a:pPr marL="0" indent="0" algn="l">
               <a:buNone/>
             </a:pPr>
             <a:r>
@@ -10962,6 +11224,13 @@
             <a:prstDash val="solid"/>
           </a:ln>
         </p:spPr>
+        <p:txBody>
+          <a:bodyPr/>
+          <a:lstStyle/>
+          <a:p>
+            <a:endParaRPr lang="sv-SE"/>
+          </a:p>
+        </p:txBody>
       </p:sp>
       <p:sp>
         <p:nvSpPr>
@@ -10984,7 +11253,7 @@
           <a:bodyPr wrap="square" lIns="0" tIns="0" rIns="0" bIns="0" rtlCol="0" anchor="ctr"/>
           <a:lstStyle/>
           <a:p>
-            <a:pPr indent="0" marL="0">
+            <a:pPr marL="0" indent="0">
               <a:buNone/>
             </a:pPr>
             <a:r>
@@ -11023,7 +11292,7 @@
           <a:bodyPr wrap="square" lIns="0" tIns="0" rIns="0" bIns="0" rtlCol="0" anchor="ctr"/>
           <a:lstStyle/>
           <a:p>
-            <a:pPr indent="0" marL="0">
+            <a:pPr marL="0" indent="0">
               <a:buNone/>
             </a:pPr>
             <a:r>
@@ -11256,6 +11525,13 @@
             <a:prstDash val="solid"/>
           </a:ln>
         </p:spPr>
+        <p:txBody>
+          <a:bodyPr/>
+          <a:lstStyle/>
+          <a:p>
+            <a:endParaRPr lang="sv-SE"/>
+          </a:p>
+        </p:txBody>
       </p:sp>
       <p:sp>
         <p:nvSpPr>
@@ -11281,6 +11557,13 @@
             <a:prstDash val="solid"/>
           </a:ln>
         </p:spPr>
+        <p:txBody>
+          <a:bodyPr/>
+          <a:lstStyle/>
+          <a:p>
+            <a:endParaRPr lang="sv-SE"/>
+          </a:p>
+        </p:txBody>
       </p:sp>
       <p:sp>
         <p:nvSpPr>
@@ -11303,7 +11586,7 @@
           <a:bodyPr wrap="square" lIns="0" tIns="0" rIns="0" bIns="0" rtlCol="0" anchor="ctr"/>
           <a:lstStyle/>
           <a:p>
-            <a:pPr indent="0" marL="0">
+            <a:pPr marL="0" indent="0">
               <a:buNone/>
             </a:pPr>
             <a:r>
@@ -11342,7 +11625,7 @@
           <a:bodyPr wrap="square" lIns="0" tIns="0" rIns="0" bIns="0" rtlCol="0" anchor="ctr"/>
           <a:lstStyle/>
           <a:p>
-            <a:pPr indent="0" marL="0">
+            <a:pPr marL="0" indent="0">
               <a:buNone/>
             </a:pPr>
             <a:r>
@@ -11356,9 +11639,6 @@
               </a:rPr>
               <a:t>.NET: </a:t>
             </a:r>
-            <a:pPr indent="0" marL="0">
-              <a:buNone/>
-            </a:pPr>
             <a:r>
               <a:rPr lang="en-US" sz="1400" dirty="0">
                 <a:solidFill>
@@ -11371,9 +11651,6 @@
               <a:t>NSubstitute (vi använder detta) · Moq · FakeItEasy
 </a:t>
             </a:r>
-            <a:pPr indent="0" marL="0">
-              <a:buNone/>
-            </a:pPr>
             <a:r>
               <a:rPr lang="en-US" sz="1400" b="1" dirty="0">
                 <a:solidFill>
@@ -11385,9 +11662,6 @@
               </a:rPr>
               <a:t>Krav: </a:t>
             </a:r>
-            <a:pPr indent="0" marL="0">
-              <a:buNone/>
-            </a:pPr>
             <a:r>
               <a:rPr lang="en-US" sz="1400" dirty="0">
                 <a:solidFill>
@@ -11419,6 +11693,7 @@
         <a:solidFill>
           <a:srgbClr val="F5F5F5"/>
         </a:solidFill>
+        <a:effectLst/>
       </p:bgPr>
     </p:bg>
     <p:spTree>
@@ -11459,6 +11734,13 @@
             <a:prstDash val="solid"/>
           </a:ln>
         </p:spPr>
+        <p:txBody>
+          <a:bodyPr/>
+          <a:lstStyle/>
+          <a:p>
+            <a:endParaRPr lang="sv-SE"/>
+          </a:p>
+        </p:txBody>
       </p:sp>
       <p:sp>
         <p:nvSpPr>
@@ -11481,7 +11763,7 @@
           <a:bodyPr wrap="square" lIns="0" tIns="0" rIns="0" bIns="0" rtlCol="0" anchor="ctr"/>
           <a:lstStyle/>
           <a:p>
-            <a:pPr algn="l" indent="0" marL="0">
+            <a:pPr marL="0" indent="0" algn="l">
               <a:buNone/>
             </a:pPr>
             <a:r>
@@ -11523,6 +11805,13 @@
             <a:prstDash val="solid"/>
           </a:ln>
         </p:spPr>
+        <p:txBody>
+          <a:bodyPr/>
+          <a:lstStyle/>
+          <a:p>
+            <a:endParaRPr lang="sv-SE"/>
+          </a:p>
+        </p:txBody>
       </p:sp>
       <p:sp>
         <p:nvSpPr>
@@ -11548,13 +11837,20 @@
             <a:prstDash val="solid"/>
           </a:ln>
           <a:effectLst>
-            <a:outerShdw sx="100000" sy="100000" kx="0" ky="0" algn="bl" rotWithShape="0" blurRad="101600" dist="38100" dir="8100000">
+            <a:outerShdw blurRad="101600" dist="38100" dir="8100000" algn="bl" rotWithShape="0">
               <a:srgbClr val="000000">
                 <a:alpha val="12000"/>
               </a:srgbClr>
             </a:outerShdw>
           </a:effectLst>
         </p:spPr>
+        <p:txBody>
+          <a:bodyPr/>
+          <a:lstStyle/>
+          <a:p>
+            <a:endParaRPr lang="sv-SE"/>
+          </a:p>
+        </p:txBody>
       </p:sp>
       <p:sp>
         <p:nvSpPr>
@@ -11577,7 +11873,7 @@
           <a:bodyPr wrap="square" lIns="0" tIns="0" rIns="0" bIns="0" rtlCol="0" anchor="t"/>
           <a:lstStyle/>
           <a:p>
-            <a:pPr indent="0" marL="0">
+            <a:pPr marL="0" indent="0">
               <a:buNone/>
             </a:pPr>
             <a:r>
@@ -11594,7 +11890,7 @@
             <a:endParaRPr lang="en-US" sz="1200" dirty="0"/>
           </a:p>
           <a:p>
-            <a:pPr indent="0" marL="0">
+            <a:pPr marL="0" indent="0">
               <a:buNone/>
             </a:pPr>
             <a:r>
@@ -11611,13 +11907,13 @@
             <a:endParaRPr lang="en-US" sz="1200" dirty="0"/>
           </a:p>
           <a:p>
-            <a:pPr indent="0" marL="0">
+            <a:pPr marL="0" indent="0">
               <a:buNone/>
             </a:pPr>
             <a:endParaRPr lang="en-US" sz="1200" dirty="0"/>
           </a:p>
           <a:p>
-            <a:pPr indent="0" marL="0">
+            <a:pPr marL="0" indent="0">
               <a:buNone/>
             </a:pPr>
             <a:r>
@@ -11634,7 +11930,7 @@
             <a:endParaRPr lang="en-US" sz="1200" dirty="0"/>
           </a:p>
           <a:p>
-            <a:pPr indent="0" marL="0">
+            <a:pPr marL="0" indent="0">
               <a:buNone/>
             </a:pPr>
             <a:r>
@@ -11651,13 +11947,13 @@
             <a:endParaRPr lang="en-US" sz="1200" dirty="0"/>
           </a:p>
           <a:p>
-            <a:pPr indent="0" marL="0">
+            <a:pPr marL="0" indent="0">
               <a:buNone/>
             </a:pPr>
             <a:endParaRPr lang="en-US" sz="1200" dirty="0"/>
           </a:p>
           <a:p>
-            <a:pPr indent="0" marL="0">
+            <a:pPr marL="0" indent="0">
               <a:buNone/>
             </a:pPr>
             <a:r>
@@ -11674,13 +11970,13 @@
             <a:endParaRPr lang="en-US" sz="1200" dirty="0"/>
           </a:p>
           <a:p>
-            <a:pPr indent="0" marL="0">
+            <a:pPr marL="0" indent="0">
               <a:buNone/>
             </a:pPr>
             <a:endParaRPr lang="en-US" sz="1200" dirty="0"/>
           </a:p>
           <a:p>
-            <a:pPr indent="0" marL="0">
+            <a:pPr marL="0" indent="0">
               <a:buNone/>
             </a:pPr>
             <a:r>
@@ -11697,7 +11993,7 @@
             <a:endParaRPr lang="en-US" sz="1200" dirty="0"/>
           </a:p>
           <a:p>
-            <a:pPr indent="0" marL="0">
+            <a:pPr marL="0" indent="0">
               <a:buNone/>
             </a:pPr>
             <a:r>
@@ -11714,13 +12010,13 @@
             <a:endParaRPr lang="en-US" sz="1200" dirty="0"/>
           </a:p>
           <a:p>
-            <a:pPr indent="0" marL="0">
+            <a:pPr marL="0" indent="0">
               <a:buNone/>
             </a:pPr>
             <a:endParaRPr lang="en-US" sz="1200" dirty="0"/>
           </a:p>
           <a:p>
-            <a:pPr indent="0" marL="0">
+            <a:pPr marL="0" indent="0">
               <a:buNone/>
             </a:pPr>
             <a:r>
@@ -11737,7 +12033,7 @@
             <a:endParaRPr lang="en-US" sz="1200" dirty="0"/>
           </a:p>
           <a:p>
-            <a:pPr indent="0" marL="0">
+            <a:pPr marL="0" indent="0">
               <a:buNone/>
             </a:pPr>
             <a:r>
@@ -11754,7 +12050,7 @@
             <a:endParaRPr lang="en-US" sz="1200" dirty="0"/>
           </a:p>
           <a:p>
-            <a:pPr indent="0" marL="0">
+            <a:pPr marL="0" indent="0">
               <a:buNone/>
             </a:pPr>
             <a:r>
@@ -11771,7 +12067,7 @@
             <a:endParaRPr lang="en-US" sz="1200" dirty="0"/>
           </a:p>
           <a:p>
-            <a:pPr indent="0" marL="0">
+            <a:pPr marL="0" indent="0">
               <a:buNone/>
             </a:pPr>
             <a:r>
@@ -11788,7 +12084,7 @@
             <a:endParaRPr lang="en-US" sz="1200" dirty="0"/>
           </a:p>
           <a:p>
-            <a:pPr indent="0" marL="0">
+            <a:pPr marL="0" indent="0">
               <a:buNone/>
             </a:pPr>
             <a:r>
@@ -11805,7 +12101,7 @@
             <a:endParaRPr lang="en-US" sz="1200" dirty="0"/>
           </a:p>
           <a:p>
-            <a:pPr indent="0" marL="0">
+            <a:pPr marL="0" indent="0">
               <a:buNone/>
             </a:pPr>
             <a:r>
@@ -11822,7 +12118,7 @@
             <a:endParaRPr lang="en-US" sz="1200" dirty="0"/>
           </a:p>
           <a:p>
-            <a:pPr indent="0" marL="0">
+            <a:pPr marL="0" indent="0">
               <a:buNone/>
             </a:pPr>
             <a:r>
@@ -12141,4 +12437,319 @@
     </a:ext>
   </a:extLst>
 </a:theme>
+</file>
+
+<file path=ppt/theme/theme2.xml><?xml version="1.0" encoding="utf-8"?>
+<a:theme xmlns:a="http://schemas.openxmlformats.org/drawingml/2006/main" name="Office-tema">
+  <a:themeElements>
+    <a:clrScheme name="Office">
+      <a:dk1>
+        <a:sysClr val="windowText" lastClr="000000"/>
+      </a:dk1>
+      <a:lt1>
+        <a:sysClr val="window" lastClr="FFFFFF"/>
+      </a:lt1>
+      <a:dk2>
+        <a:srgbClr val="0E2841"/>
+      </a:dk2>
+      <a:lt2>
+        <a:srgbClr val="E8E8E8"/>
+      </a:lt2>
+      <a:accent1>
+        <a:srgbClr val="156082"/>
+      </a:accent1>
+      <a:accent2>
+        <a:srgbClr val="E97132"/>
+      </a:accent2>
+      <a:accent3>
+        <a:srgbClr val="196B24"/>
+      </a:accent3>
+      <a:accent4>
+        <a:srgbClr val="0F9ED5"/>
+      </a:accent4>
+      <a:accent5>
+        <a:srgbClr val="A02B93"/>
+      </a:accent5>
+      <a:accent6>
+        <a:srgbClr val="4EA72E"/>
+      </a:accent6>
+      <a:hlink>
+        <a:srgbClr val="467886"/>
+      </a:hlink>
+      <a:folHlink>
+        <a:srgbClr val="96607D"/>
+      </a:folHlink>
+    </a:clrScheme>
+    <a:fontScheme name="Office">
+      <a:majorFont>
+        <a:latin typeface="Aptos Display" panose="02110004020202020204"/>
+        <a:ea typeface=""/>
+        <a:cs typeface=""/>
+        <a:font script="Jpan" typeface="游ゴシック Light"/>
+        <a:font script="Hang" typeface="맑은 고딕"/>
+        <a:font script="Hans" typeface="等线 Light"/>
+        <a:font script="Hant" typeface="新細明體"/>
+        <a:font script="Arab" typeface="Times New Roman"/>
+        <a:font script="Hebr" typeface="Times New Roman"/>
+        <a:font script="Thai" typeface="Angsana New"/>
+        <a:font script="Ethi" typeface="Nyala"/>
+        <a:font script="Beng" typeface="Vrinda"/>
+        <a:font script="Gujr" typeface="Shruti"/>
+        <a:font script="Khmr" typeface="MoolBoran"/>
+        <a:font script="Knda" typeface="Tunga"/>
+        <a:font script="Guru" typeface="Raavi"/>
+        <a:font script="Cans" typeface="Euphemia"/>
+        <a:font script="Cher" typeface="Plantagenet Cherokee"/>
+        <a:font script="Yiii" typeface="Microsoft Yi Baiti"/>
+        <a:font script="Tibt" typeface="Microsoft Himalaya"/>
+        <a:font script="Thaa" typeface="MV Boli"/>
+        <a:font script="Deva" typeface="Mangal"/>
+        <a:font script="Telu" typeface="Gautami"/>
+        <a:font script="Taml" typeface="Latha"/>
+        <a:font script="Syrc" typeface="Estrangelo Edessa"/>
+        <a:font script="Orya" typeface="Kalinga"/>
+        <a:font script="Mlym" typeface="Kartika"/>
+        <a:font script="Laoo" typeface="DokChampa"/>
+        <a:font script="Sinh" typeface="Iskoola Pota"/>
+        <a:font script="Mong" typeface="Mongolian Baiti"/>
+        <a:font script="Viet" typeface="Times New Roman"/>
+        <a:font script="Uigh" typeface="Microsoft Uighur"/>
+        <a:font script="Geor" typeface="Sylfaen"/>
+        <a:font script="Armn" typeface="Arial"/>
+        <a:font script="Bugi" typeface="Leelawadee UI"/>
+        <a:font script="Bopo" typeface="Microsoft JhengHei"/>
+        <a:font script="Java" typeface="Javanese Text"/>
+        <a:font script="Lisu" typeface="Segoe UI"/>
+        <a:font script="Mymr" typeface="Myanmar Text"/>
+        <a:font script="Nkoo" typeface="Ebrima"/>
+        <a:font script="Olck" typeface="Nirmala UI"/>
+        <a:font script="Osma" typeface="Ebrima"/>
+        <a:font script="Phag" typeface="Phagspa"/>
+        <a:font script="Syrn" typeface="Estrangelo Edessa"/>
+        <a:font script="Syrj" typeface="Estrangelo Edessa"/>
+        <a:font script="Syre" typeface="Estrangelo Edessa"/>
+        <a:font script="Sora" typeface="Nirmala UI"/>
+        <a:font script="Tale" typeface="Microsoft Tai Le"/>
+        <a:font script="Talu" typeface="Microsoft New Tai Lue"/>
+        <a:font script="Tfng" typeface="Ebrima"/>
+      </a:majorFont>
+      <a:minorFont>
+        <a:latin typeface="Aptos" panose="02110004020202020204"/>
+        <a:ea typeface=""/>
+        <a:cs typeface=""/>
+        <a:font script="Jpan" typeface="游ゴシック"/>
+        <a:font script="Hang" typeface="맑은 고딕"/>
+        <a:font script="Hans" typeface="等线"/>
+        <a:font script="Hant" typeface="新細明體"/>
+        <a:font script="Arab" typeface="Arial"/>
+        <a:font script="Hebr" typeface="Arial"/>
+        <a:font script="Thai" typeface="Cordia New"/>
+        <a:font script="Ethi" typeface="Nyala"/>
+        <a:font script="Beng" typeface="Vrinda"/>
+        <a:font script="Gujr" typeface="Shruti"/>
+        <a:font script="Khmr" typeface="DaunPenh"/>
+        <a:font script="Knda" typeface="Tunga"/>
+        <a:font script="Guru" typeface="Raavi"/>
+        <a:font script="Cans" typeface="Euphemia"/>
+        <a:font script="Cher" typeface="Plantagenet Cherokee"/>
+        <a:font script="Yiii" typeface="Microsoft Yi Baiti"/>
+        <a:font script="Tibt" typeface="Microsoft Himalaya"/>
+        <a:font script="Thaa" typeface="MV Boli"/>
+        <a:font script="Deva" typeface="Mangal"/>
+        <a:font script="Telu" typeface="Gautami"/>
+        <a:font script="Taml" typeface="Latha"/>
+        <a:font script="Syrc" typeface="Estrangelo Edessa"/>
+        <a:font script="Orya" typeface="Kalinga"/>
+        <a:font script="Mlym" typeface="Kartika"/>
+        <a:font script="Laoo" typeface="DokChampa"/>
+        <a:font script="Sinh" typeface="Iskoola Pota"/>
+        <a:font script="Mong" typeface="Mongolian Baiti"/>
+        <a:font script="Viet" typeface="Arial"/>
+        <a:font script="Uigh" typeface="Microsoft Uighur"/>
+        <a:font script="Geor" typeface="Sylfaen"/>
+        <a:font script="Armn" typeface="Arial"/>
+        <a:font script="Bugi" typeface="Leelawadee UI"/>
+        <a:font script="Bopo" typeface="Microsoft JhengHei"/>
+        <a:font script="Java" typeface="Javanese Text"/>
+        <a:font script="Lisu" typeface="Segoe UI"/>
+        <a:font script="Mymr" typeface="Myanmar Text"/>
+        <a:font script="Nkoo" typeface="Ebrima"/>
+        <a:font script="Olck" typeface="Nirmala UI"/>
+        <a:font script="Osma" typeface="Ebrima"/>
+        <a:font script="Phag" typeface="Phagspa"/>
+        <a:font script="Syrn" typeface="Estrangelo Edessa"/>
+        <a:font script="Syrj" typeface="Estrangelo Edessa"/>
+        <a:font script="Syre" typeface="Estrangelo Edessa"/>
+        <a:font script="Sora" typeface="Nirmala UI"/>
+        <a:font script="Tale" typeface="Microsoft Tai Le"/>
+        <a:font script="Talu" typeface="Microsoft New Tai Lue"/>
+        <a:font script="Tfng" typeface="Ebrima"/>
+      </a:minorFont>
+    </a:fontScheme>
+    <a:fmtScheme name="Office">
+      <a:fillStyleLst>
+        <a:solidFill>
+          <a:schemeClr val="phClr"/>
+        </a:solidFill>
+        <a:gradFill rotWithShape="1">
+          <a:gsLst>
+            <a:gs pos="0">
+              <a:schemeClr val="phClr">
+                <a:lumMod val="110000"/>
+                <a:satMod val="105000"/>
+                <a:tint val="67000"/>
+              </a:schemeClr>
+            </a:gs>
+            <a:gs pos="50000">
+              <a:schemeClr val="phClr">
+                <a:lumMod val="105000"/>
+                <a:satMod val="103000"/>
+                <a:tint val="73000"/>
+              </a:schemeClr>
+            </a:gs>
+            <a:gs pos="100000">
+              <a:schemeClr val="phClr">
+                <a:lumMod val="105000"/>
+                <a:satMod val="109000"/>
+                <a:tint val="81000"/>
+              </a:schemeClr>
+            </a:gs>
+          </a:gsLst>
+          <a:lin ang="5400000" scaled="0"/>
+        </a:gradFill>
+        <a:gradFill rotWithShape="1">
+          <a:gsLst>
+            <a:gs pos="0">
+              <a:schemeClr val="phClr">
+                <a:satMod val="103000"/>
+                <a:lumMod val="102000"/>
+                <a:tint val="94000"/>
+              </a:schemeClr>
+            </a:gs>
+            <a:gs pos="50000">
+              <a:schemeClr val="phClr">
+                <a:satMod val="110000"/>
+                <a:lumMod val="100000"/>
+                <a:shade val="100000"/>
+              </a:schemeClr>
+            </a:gs>
+            <a:gs pos="100000">
+              <a:schemeClr val="phClr">
+                <a:lumMod val="99000"/>
+                <a:satMod val="120000"/>
+                <a:shade val="78000"/>
+              </a:schemeClr>
+            </a:gs>
+          </a:gsLst>
+          <a:lin ang="5400000" scaled="0"/>
+        </a:gradFill>
+      </a:fillStyleLst>
+      <a:lnStyleLst>
+        <a:ln w="12700" cap="flat" cmpd="sng" algn="ctr">
+          <a:solidFill>
+            <a:schemeClr val="phClr"/>
+          </a:solidFill>
+          <a:prstDash val="solid"/>
+          <a:miter lim="800000"/>
+        </a:ln>
+        <a:ln w="19050" cap="flat" cmpd="sng" algn="ctr">
+          <a:solidFill>
+            <a:schemeClr val="phClr"/>
+          </a:solidFill>
+          <a:prstDash val="solid"/>
+          <a:miter lim="800000"/>
+        </a:ln>
+        <a:ln w="25400" cap="flat" cmpd="sng" algn="ctr">
+          <a:solidFill>
+            <a:schemeClr val="phClr"/>
+          </a:solidFill>
+          <a:prstDash val="solid"/>
+          <a:miter lim="800000"/>
+        </a:ln>
+      </a:lnStyleLst>
+      <a:effectStyleLst>
+        <a:effectStyle>
+          <a:effectLst/>
+        </a:effectStyle>
+        <a:effectStyle>
+          <a:effectLst/>
+        </a:effectStyle>
+        <a:effectStyle>
+          <a:effectLst>
+            <a:outerShdw blurRad="57150" dist="19050" dir="5400000" algn="ctr" rotWithShape="0">
+              <a:srgbClr val="000000">
+                <a:alpha val="63000"/>
+              </a:srgbClr>
+            </a:outerShdw>
+          </a:effectLst>
+        </a:effectStyle>
+      </a:effectStyleLst>
+      <a:bgFillStyleLst>
+        <a:solidFill>
+          <a:schemeClr val="phClr"/>
+        </a:solidFill>
+        <a:solidFill>
+          <a:schemeClr val="phClr">
+            <a:tint val="95000"/>
+            <a:satMod val="170000"/>
+          </a:schemeClr>
+        </a:solidFill>
+        <a:gradFill rotWithShape="1">
+          <a:gsLst>
+            <a:gs pos="0">
+              <a:schemeClr val="phClr">
+                <a:tint val="93000"/>
+                <a:satMod val="150000"/>
+                <a:shade val="98000"/>
+                <a:lumMod val="102000"/>
+              </a:schemeClr>
+            </a:gs>
+            <a:gs pos="50000">
+              <a:schemeClr val="phClr">
+                <a:tint val="98000"/>
+                <a:satMod val="130000"/>
+                <a:shade val="90000"/>
+                <a:lumMod val="103000"/>
+              </a:schemeClr>
+            </a:gs>
+            <a:gs pos="100000">
+              <a:schemeClr val="phClr">
+                <a:shade val="63000"/>
+                <a:satMod val="120000"/>
+              </a:schemeClr>
+            </a:gs>
+          </a:gsLst>
+          <a:lin ang="5400000" scaled="0"/>
+        </a:gradFill>
+      </a:bgFillStyleLst>
+    </a:fmtScheme>
+  </a:themeElements>
+  <a:objectDefaults>
+    <a:lnDef>
+      <a:spPr/>
+      <a:bodyPr/>
+      <a:lstStyle/>
+      <a:style>
+        <a:lnRef idx="2">
+          <a:schemeClr val="accent1"/>
+        </a:lnRef>
+        <a:fillRef idx="0">
+          <a:schemeClr val="accent1"/>
+        </a:fillRef>
+        <a:effectRef idx="1">
+          <a:schemeClr val="accent1"/>
+        </a:effectRef>
+        <a:fontRef idx="minor">
+          <a:schemeClr val="tx1"/>
+        </a:fontRef>
+      </a:style>
+    </a:lnDef>
+  </a:objectDefaults>
+  <a:extraClrSchemeLst/>
+  <a:extLst>
+    <a:ext uri="{05A4C25C-085E-4340-85A3-A5531E510DB2}">
+      <thm15:themeFamily xmlns:thm15="http://schemas.microsoft.com/office/thememl/2012/main" name="Office Theme" id="{2E142A2C-CD16-42D6-873A-C26D2A0506FA}" vid="{1BDDFF52-6CD6-40A5-AB3C-68EB2F1E4D0A}"/>
+    </a:ext>
+  </a:extLst>
+</a:theme>
 </file>